--- a/Topic_D/Exam_Practice/TD-L11_Speaking_Workshop_Topic_D_Integrated_Communication_Workshop.pptx
+++ b/Topic_D/Exam_Practice/TD-L11_Speaking_Workshop_Topic_D_Integrated_Communication_Workshop.pptx
@@ -615,7 +615,11 @@
           <a:lstStyle/>
           <a:p>
             <a:r>
-              <a:rPr lang="en-US" dirty="0"/>
+              <a:rPr lang="ar-SA" dirty="0">
+                <a:latin typeface="Amiri" pitchFamily="2" charset="-78"/>
+                <a:ea typeface="Amiri" pitchFamily="2" charset="-78"/>
+                <a:cs typeface="Amiri" pitchFamily="2" charset="-78"/>
+              </a:rPr>
               <a:t>ROLE PLAY C (Develop) — a mentoring session.
 SET-UP IN THE BREAKOUT ROOM: A = examiner (reads the left column ONLY — the questions, in order), B = candidate (sees the task column; Core may use the help column), C = observer (ticks the feedback checklist). 1 minute preparation, about 3 minutes speaking, 1 minute feedback, then rotate.
 Task ! is the unexpected question: in the exam the candidate has not seen it — the examiner should read it without warning.
@@ -707,7 +711,11 @@
           <a:lstStyle/>
           <a:p>
             <a:r>
-              <a:rPr lang="en-US" dirty="0"/>
+              <a:rPr lang="ar-SA" dirty="0">
+                <a:latin typeface="Amiri" pitchFamily="2" charset="-78"/>
+                <a:ea typeface="Amiri" pitchFamily="2" charset="-78"/>
+                <a:cs typeface="Amiri" pitchFamily="2" charset="-78"/>
+              </a:rPr>
               <a:t>ROLE PLAY D (Stretch) — a final interview.
 SET-UP IN THE BREAKOUT ROOM: A = examiner (reads the left column ONLY — the questions, in order), B = candidate (sees the task column; Core may use the help column), C = observer (ticks the feedback checklist). 1 minute preparation, about 3 minutes speaking, 1 minute feedback, then rotate.
 Task ! is the unexpected question: in the exam the candidate has not seen it — the examiner should read it without warning.
@@ -1243,7 +1251,11 @@
           <a:lstStyle/>
           <a:p>
             <a:r>
-              <a:rPr lang="en-US" dirty="0"/>
+              <a:rPr lang="ar-SA" dirty="0">
+                <a:latin typeface="Amiri" pitchFamily="2" charset="-78"/>
+                <a:ea typeface="Amiri" pitchFamily="2" charset="-78"/>
+                <a:cs typeface="Amiri" pitchFamily="2" charset="-78"/>
+              </a:rPr>
               <a:t>TOPIC CONVERSATION — Core. Examiner asks the questions in order and may add “لِمَاذَا؟ / هَلْ يُمْكِنُ أَنْ تَشْرَحَ أَكْثَرَ؟” to push for more. Candidate aims for one full sentence per question.
 </a:t>
             </a:r>
@@ -1332,7 +1344,11 @@
           <a:lstStyle/>
           <a:p>
             <a:r>
-              <a:rPr lang="en-US" dirty="0"/>
+              <a:rPr lang="ar-SA" dirty="0">
+                <a:latin typeface="Amiri" pitchFamily="2" charset="-78"/>
+                <a:ea typeface="Amiri" pitchFamily="2" charset="-78"/>
+                <a:cs typeface="Amiri" pitchFamily="2" charset="-78"/>
+              </a:rPr>
               <a:t>TOPIC CONVERSATION — Develop. Examiner asks the questions in order and may add “لِمَاذَا؟ / هَلْ يُمْكِنُ أَنْ تَشْرَحَ أَكْثَرَ؟” to push for more. Candidate aims for two or three sentences, with linkers and two or three time frames.
 </a:t>
             </a:r>
@@ -1421,7 +1437,11 @@
           <a:lstStyle/>
           <a:p>
             <a:r>
-              <a:rPr lang="en-US" dirty="0"/>
+              <a:rPr lang="ar-SA" dirty="0">
+                <a:latin typeface="Amiri" pitchFamily="2" charset="-78"/>
+                <a:ea typeface="Amiri" pitchFamily="2" charset="-78"/>
+                <a:cs typeface="Amiri" pitchFamily="2" charset="-78"/>
+              </a:rPr>
               <a:t>TOPIC CONVERSATION — Stretch. Examiner asks the questions in order and may add “لِمَاذَا؟ / هَلْ يُمْكِنُ أَنْ تَشْرَحَ أَكْثَرَ؟” to push for more. Candidate aims for a developed answer: opinion, balance, concession and a conditional.
 </a:t>
             </a:r>
@@ -1510,7 +1530,11 @@
           <a:lstStyle/>
           <a:p>
             <a:r>
-              <a:rPr lang="en-US" dirty="0"/>
+              <a:rPr lang="ar-SA" dirty="0">
+                <a:latin typeface="Amiri" pitchFamily="2" charset="-78"/>
+                <a:ea typeface="Amiri" pitchFamily="2" charset="-78"/>
+                <a:cs typeface="Amiri" pitchFamily="2" charset="-78"/>
+              </a:rPr>
               <a:t>WELCOME (1 min) — while students join.
 • Greet each student by name as they arrive: السَّلَامُ عَلَيْكُمْ. Take the register (Pastoral Tracker: attendance 0/1).
 • 2-MINUTE CHECK-IN (SEND training): a private chat to any student who seemed unsettled last lesson — “Are you okay today? 👍 / 👎”.
@@ -2224,7 +2248,11 @@
           <a:lstStyle/>
           <a:p>
             <a:r>
-              <a:rPr lang="en-US" dirty="0"/>
+              <a:rPr lang="ar-SA" dirty="0">
+                <a:latin typeface="Amiri" pitchFamily="2" charset="-78"/>
+                <a:ea typeface="Amiri" pitchFamily="2" charset="-78"/>
+                <a:cs typeface="Amiri" pitchFamily="2" charset="-78"/>
+              </a:rPr>
               <a:t>TEACH (3 min). Role play = precise and complete; conversation = develop. Choral repetition of the repair phrases. To a girl: تُعِيدِي.</a:t>
             </a:r>
             <a:endParaRPr lang="en-US" dirty="0"/>
@@ -2312,7 +2340,11 @@
           <a:lstStyle/>
           <a:p>
             <a:r>
-              <a:rPr lang="en-US" dirty="0"/>
+              <a:rPr lang="ar-SA" dirty="0">
+                <a:latin typeface="Amiri" pitchFamily="2" charset="-78"/>
+                <a:ea typeface="Amiri" pitchFamily="2" charset="-78"/>
+                <a:cs typeface="Amiri" pitchFamily="2" charset="-78"/>
+              </a:rPr>
               <a:t>LANGUAGE BANK (2 min) — the Topic D story in three tenses: كُنْتُ أَدْرُسُ … أَمَّا الآنَ فَأَتَدَرَّبُ … وَسَأَعْمَلُ … Link with أَوَّلًا · بِالإِضَافَةِ إِلَى ذٰلِكَ · مَعَ ذٰلِكَ · لِذٰلِكَ. Target: three linkers and three tenses in every developed answer.</a:t>
             </a:r>
             <a:endParaRPr lang="en-US" dirty="0"/>
@@ -2400,7 +2432,11 @@
           <a:lstStyle/>
           <a:p>
             <a:r>
-              <a:rPr lang="en-US" dirty="0"/>
+              <a:rPr lang="ar-SA" dirty="0">
+                <a:latin typeface="Amiri" pitchFamily="2" charset="-78"/>
+                <a:ea typeface="Amiri" pitchFamily="2" charset="-78"/>
+                <a:cs typeface="Amiri" pitchFamily="2" charset="-78"/>
+              </a:rPr>
               <a:t>LANGUAGE BANK (2 min) — the examiner may jump from school to jobs to plans: have one sentence ready for each. Register: with a friend أَهْلًا · كَيْفَ حَالُكَ؟; in an interview حَضْرَتُكَ · يَسُرُّنِي أَنْ · شُكْرًا عَلَى وَقْتِكُمْ.</a:t>
             </a:r>
             <a:endParaRPr lang="en-US" dirty="0"/>
@@ -2576,7 +2612,11 @@
           <a:lstStyle/>
           <a:p>
             <a:r>
-              <a:rPr lang="en-US" dirty="0"/>
+              <a:rPr lang="ar-SA" dirty="0">
+                <a:latin typeface="Amiri" pitchFamily="2" charset="-78"/>
+                <a:ea typeface="Amiri" pitchFamily="2" charset="-78"/>
+                <a:cs typeface="Amiri" pitchFamily="2" charset="-78"/>
+              </a:rPr>
               <a:t>ROLE PLAY A (Core) — a careers fair stall.
 SET-UP IN THE BREAKOUT ROOM: A = examiner (reads the left column ONLY — the questions, in order), B = candidate (sees the task column; Core may use the help column), C = observer (ticks the feedback checklist). 1 minute preparation, about 3 minutes speaking, 1 minute feedback, then rotate.
 Task ! is the unexpected question: in the exam the candidate has not seen it — the examiner should read it without warning.
@@ -2668,7 +2708,11 @@
           <a:lstStyle/>
           <a:p>
             <a:r>
-              <a:rPr lang="en-US" dirty="0"/>
+              <a:rPr lang="ar-SA" dirty="0">
+                <a:latin typeface="Amiri" pitchFamily="2" charset="-78"/>
+                <a:ea typeface="Amiri" pitchFamily="2" charset="-78"/>
+                <a:cs typeface="Amiri" pitchFamily="2" charset="-78"/>
+              </a:rPr>
               <a:t>ROLE PLAY B (Core+) — two registers.
 SET-UP IN THE BREAKOUT ROOM: A = examiner (reads the left column ONLY — the questions, in order), B = candidate (sees the task column; Core may use the help column), C = observer (ticks the feedback checklist). 1 minute preparation, about 3 minutes speaking, 1 minute feedback, then rotate.
 Task ! is the unexpected question: in the exam the candidate has not seen it — the examiner should read it without warning.
@@ -3156,6 +3200,7 @@
                   <a:srgbClr val="D4AF37"/>
                 </a:solidFill>
                 <a:latin typeface="Amiri" pitchFamily="2" charset="-78"/>
+                <a:ea typeface="Amiri" pitchFamily="2" charset="-78"/>
                 <a:cs typeface="Amiri" pitchFamily="2" charset="-78"/>
               </a:rPr>
               <a:t>م</a:t>
@@ -3362,6 +3407,7 @@
                   <a:srgbClr val="D4AF37"/>
                 </a:solidFill>
                 <a:latin typeface="Amiri" pitchFamily="2" charset="-78"/>
+                <a:ea typeface="Amiri" pitchFamily="2" charset="-78"/>
                 <a:cs typeface="Amiri" pitchFamily="2" charset="-78"/>
               </a:rPr>
               <a:t>وَرْشَةُ التَّحَدُّثِ — وَرْشَةُ التَّوَاصُلِ المُتَكَامِلِ</a:t>
@@ -3413,6 +3459,7 @@
                   <a:srgbClr val="C6D2E6"/>
                 </a:solidFill>
                 <a:latin typeface="Amiri" pitchFamily="2" charset="-78"/>
+                <a:ea typeface="Amiri" pitchFamily="2" charset="-78"/>
                 <a:cs typeface="Amiri" pitchFamily="2" charset="-78"/>
               </a:rPr>
               <a:t>أَوَّلًا</a:t>
@@ -3439,6 +3486,7 @@
                   <a:srgbClr val="C6D2E6"/>
                 </a:solidFill>
                 <a:latin typeface="Amiri" pitchFamily="2" charset="-78"/>
+                <a:ea typeface="Amiri" pitchFamily="2" charset="-78"/>
                 <a:cs typeface="Amiri" pitchFamily="2" charset="-78"/>
               </a:rPr>
               <a:t>بِالإِضَافَةِ إِلَى ذٰلِكَ</a:t>
@@ -3465,6 +3513,7 @@
                   <a:srgbClr val="C6D2E6"/>
                 </a:solidFill>
                 <a:latin typeface="Amiri" pitchFamily="2" charset="-78"/>
+                <a:ea typeface="Amiri" pitchFamily="2" charset="-78"/>
                 <a:cs typeface="Amiri" pitchFamily="2" charset="-78"/>
               </a:rPr>
               <a:t>مَعَ ذٰلِكَ</a:t>
@@ -3491,6 +3540,7 @@
                   <a:srgbClr val="C6D2E6"/>
                 </a:solidFill>
                 <a:latin typeface="Amiri" pitchFamily="2" charset="-78"/>
+                <a:ea typeface="Amiri" pitchFamily="2" charset="-78"/>
                 <a:cs typeface="Amiri" pitchFamily="2" charset="-78"/>
               </a:rPr>
               <a:t>لِذٰلِكَ</a:t>
@@ -3923,6 +3973,7 @@
                   <a:srgbClr val="D4AF37"/>
                 </a:solidFill>
                 <a:latin typeface="Amiri" pitchFamily="2" charset="-78"/>
+                <a:ea typeface="Amiri" pitchFamily="2" charset="-78"/>
                 <a:cs typeface="Amiri" pitchFamily="2" charset="-78"/>
               </a:rPr>
               <a:t>م</a:t>
@@ -4243,6 +4294,7 @@
                   <a:srgbClr val="8A6D1E"/>
                 </a:solidFill>
                 <a:latin typeface="Amiri" pitchFamily="2" charset="-78"/>
+                <a:ea typeface="Amiri" pitchFamily="2" charset="-78"/>
                 <a:cs typeface="Amiri" pitchFamily="2" charset="-78"/>
               </a:rPr>
               <a:t>رِحْلَتِي حَتَّى الآنَ</a:t>
@@ -4523,6 +4575,7 @@
                   <a:srgbClr val="1B3B6F"/>
                 </a:solidFill>
                 <a:latin typeface="Amiri" pitchFamily="2" charset="-78"/>
+                <a:ea typeface="Amiri" pitchFamily="2" charset="-78"/>
                 <a:cs typeface="Amiri" pitchFamily="2" charset="-78"/>
               </a:rPr>
               <a:t>فِي الثَّانَوِيَّةِ كُنْتُ … أَمَّا الآنَ فَأَدْرُسُ …</a:t>
@@ -4599,6 +4652,7 @@
                   <a:srgbClr val="1B3B6F"/>
                 </a:solidFill>
                 <a:latin typeface="Amiri" pitchFamily="2" charset="-78"/>
+                <a:ea typeface="Amiri" pitchFamily="2" charset="-78"/>
                 <a:cs typeface="Amiri" pitchFamily="2" charset="-78"/>
               </a:rPr>
               <a:t>حَدِّثْنِي عَنْ دِرَاسَتِكَ.</a:t>
@@ -4702,6 +4756,7 @@
                   <a:srgbClr val="1B3B6F"/>
                 </a:solidFill>
                 <a:latin typeface="Amiri" pitchFamily="2" charset="-78"/>
+                <a:ea typeface="Amiri" pitchFamily="2" charset="-78"/>
                 <a:cs typeface="Amiri" pitchFamily="2" charset="-78"/>
               </a:rPr>
               <a:t>أَوَّلًا … بِالإِضَافَةِ إِلَى ذٰلِكَ …</a:t>
@@ -4778,6 +4833,7 @@
                   <a:srgbClr val="1B3B6F"/>
                 </a:solidFill>
                 <a:latin typeface="Amiri" pitchFamily="2" charset="-78"/>
+                <a:ea typeface="Amiri" pitchFamily="2" charset="-78"/>
                 <a:cs typeface="Amiri" pitchFamily="2" charset="-78"/>
               </a:rPr>
               <a:t>وَمَا المَهَارَاتُ الَّتِي اكْتَسَبْتَهَا خَارِجَ المَدْرَسَةِ؟</a:t>
@@ -4881,6 +4937,7 @@
                   <a:srgbClr val="1B3B6F"/>
                 </a:solidFill>
                 <a:latin typeface="Amiri" pitchFamily="2" charset="-78"/>
+                <a:ea typeface="Amiri" pitchFamily="2" charset="-78"/>
                 <a:cs typeface="Amiri" pitchFamily="2" charset="-78"/>
               </a:rPr>
               <a:t>الوَظِيفَةُ الَّتِي … هِيَ …</a:t>
@@ -4957,6 +5014,7 @@
                   <a:srgbClr val="1B3B6F"/>
                 </a:solidFill>
                 <a:latin typeface="Amiri" pitchFamily="2" charset="-78"/>
+                <a:ea typeface="Amiri" pitchFamily="2" charset="-78"/>
                 <a:cs typeface="Amiri" pitchFamily="2" charset="-78"/>
               </a:rPr>
               <a:t>مَا الوَظِيفَةُ الَّتِي تُنَاسِبُ هٰذِهِ المَهَارَاتِ؟</a:t>
@@ -5060,6 +5118,7 @@
                   <a:srgbClr val="1B3B6F"/>
                 </a:solidFill>
                 <a:latin typeface="Amiri" pitchFamily="2" charset="-78"/>
+                <a:ea typeface="Amiri" pitchFamily="2" charset="-78"/>
                 <a:cs typeface="Amiri" pitchFamily="2" charset="-78"/>
               </a:rPr>
               <a:t>نَعَمْ، سَأَتَقَدَّمُ … لِكَيْ …</a:t>
@@ -5136,6 +5195,7 @@
                   <a:srgbClr val="1B3B6F"/>
                 </a:solidFill>
                 <a:latin typeface="Amiri" pitchFamily="2" charset="-78"/>
+                <a:ea typeface="Amiri" pitchFamily="2" charset="-78"/>
                 <a:cs typeface="Amiri" pitchFamily="2" charset="-78"/>
               </a:rPr>
               <a:t>هَلْ سَتَبْحَثُ عَنْ خِبْرَةِ عَمَلٍ هٰذَا الصَّيْفَ؟</a:t>
@@ -5239,6 +5299,7 @@
                   <a:srgbClr val="1B3B6F"/>
                 </a:solidFill>
                 <a:latin typeface="Amiri" pitchFamily="2" charset="-78"/>
+                <a:ea typeface="Amiri" pitchFamily="2" charset="-78"/>
                 <a:cs typeface="Amiri" pitchFamily="2" charset="-78"/>
               </a:rPr>
               <a:t>إِذَا لَمْ أَجِدْ …، فَسَوْفَ …</a:t>
@@ -5315,6 +5376,7 @@
                   <a:srgbClr val="1B3B6F"/>
                 </a:solidFill>
                 <a:latin typeface="Amiri" pitchFamily="2" charset="-78"/>
+                <a:ea typeface="Amiri" pitchFamily="2" charset="-78"/>
                 <a:cs typeface="Amiri" pitchFamily="2" charset="-78"/>
               </a:rPr>
               <a:t>وَإِذَا لَمْ تَجِدْ تَدْرِيبًا؟</a:t>
@@ -5524,6 +5586,7 @@
                   <a:srgbClr val="D4AF37"/>
                 </a:solidFill>
                 <a:latin typeface="Amiri" pitchFamily="2" charset="-78"/>
+                <a:ea typeface="Amiri" pitchFamily="2" charset="-78"/>
                 <a:cs typeface="Amiri" pitchFamily="2" charset="-78"/>
               </a:rPr>
               <a:t>م</a:t>
@@ -5844,6 +5907,7 @@
                   <a:srgbClr val="8A6D1E"/>
                 </a:solidFill>
                 <a:latin typeface="Amiri" pitchFamily="2" charset="-78"/>
+                <a:ea typeface="Amiri" pitchFamily="2" charset="-78"/>
                 <a:cs typeface="Amiri" pitchFamily="2" charset="-78"/>
               </a:rPr>
               <a:t>مُقَابَلَةُ المِنْحَةِ الدِّرَاسِيَّةِ</a:t>
@@ -6124,6 +6188,7 @@
                   <a:srgbClr val="1B3B6F"/>
                 </a:solidFill>
                 <a:latin typeface="Amiri" pitchFamily="2" charset="-78"/>
+                <a:ea typeface="Amiri" pitchFamily="2" charset="-78"/>
                 <a:cs typeface="Amiri" pitchFamily="2" charset="-78"/>
               </a:rPr>
               <a:t>يَسُرُّنِي أَنْ … وَالدَّلِيلُ أَنَّ …</a:t>
@@ -6200,6 +6265,7 @@
                   <a:srgbClr val="1B3B6F"/>
                 </a:solidFill>
                 <a:latin typeface="Amiri" pitchFamily="2" charset="-78"/>
+                <a:ea typeface="Amiri" pitchFamily="2" charset="-78"/>
                 <a:cs typeface="Amiri" pitchFamily="2" charset="-78"/>
               </a:rPr>
               <a:t>لِمَاذَا تَسْتَحِقُّ هٰذِهِ المِنْحَةَ؟</a:t>
@@ -6303,6 +6369,7 @@
                   <a:srgbClr val="1B3B6F"/>
                 </a:solidFill>
                 <a:latin typeface="Amiri" pitchFamily="2" charset="-78"/>
+                <a:ea typeface="Amiri" pitchFamily="2" charset="-78"/>
                 <a:cs typeface="Amiri" pitchFamily="2" charset="-78"/>
               </a:rPr>
               <a:t>عِنْدَمَا … كُنْتُ … فَكُنْتُ أَدْرُسُ …</a:t>
@@ -6379,6 +6446,7 @@
                   <a:srgbClr val="1B3B6F"/>
                 </a:solidFill>
                 <a:latin typeface="Amiri" pitchFamily="2" charset="-78"/>
+                <a:ea typeface="Amiri" pitchFamily="2" charset="-78"/>
                 <a:cs typeface="Amiri" pitchFamily="2" charset="-78"/>
               </a:rPr>
               <a:t>مَا أَكْبَرُ تَحَدٍّ وَاجَهْتَهُ فِي دِرَاسَتِكَ؟</a:t>
@@ -6482,6 +6550,7 @@
                   <a:srgbClr val="1B3B6F"/>
                 </a:solidFill>
                 <a:latin typeface="Amiri" pitchFamily="2" charset="-78"/>
+                <a:ea typeface="Amiri" pitchFamily="2" charset="-78"/>
                 <a:cs typeface="Amiri" pitchFamily="2" charset="-78"/>
               </a:rPr>
               <a:t>صَحِيحٌ أَنَّ … غَيْرَ أَنَّ … لِذٰلِكَ …</a:t>
@@ -6558,6 +6627,7 @@
                   <a:srgbClr val="1B3B6F"/>
                 </a:solidFill>
                 <a:latin typeface="Amiri" pitchFamily="2" charset="-78"/>
+                <a:ea typeface="Amiri" pitchFamily="2" charset="-78"/>
                 <a:cs typeface="Amiri" pitchFamily="2" charset="-78"/>
               </a:rPr>
               <a:t>هَلِ الدَّرَجَاتُ أَهَمُّ مِنَ المَهَارَاتِ؟</a:t>
@@ -6661,6 +6731,7 @@
                   <a:srgbClr val="1B3B6F"/>
                 </a:solidFill>
                 <a:latin typeface="Amiri" pitchFamily="2" charset="-78"/>
+                <a:ea typeface="Amiri" pitchFamily="2" charset="-78"/>
                 <a:cs typeface="Amiri" pitchFamily="2" charset="-78"/>
               </a:rPr>
               <a:t>سَأَدْرُسُ … ثُمَّ أَطْمَحُ إِلَى … لِكَيْ …</a:t>
@@ -6737,6 +6808,7 @@
                   <a:srgbClr val="1B3B6F"/>
                 </a:solidFill>
                 <a:latin typeface="Amiri" pitchFamily="2" charset="-78"/>
+                <a:ea typeface="Amiri" pitchFamily="2" charset="-78"/>
                 <a:cs typeface="Amiri" pitchFamily="2" charset="-78"/>
               </a:rPr>
               <a:t>كَيْفَ سَتَسْتَخْدِمُ المِنْحَةَ؟</a:t>
@@ -6840,6 +6912,7 @@
                   <a:srgbClr val="1B3B6F"/>
                 </a:solidFill>
                 <a:latin typeface="Amiri" pitchFamily="2" charset="-78"/>
+                <a:ea typeface="Amiri" pitchFamily="2" charset="-78"/>
                 <a:cs typeface="Amiri" pitchFamily="2" charset="-78"/>
               </a:rPr>
               <a:t>لَوْ لَمْ أَحْصُلْ …، لَعَمِلْتُ … لٰكِنَّ …</a:t>
@@ -6916,6 +6989,7 @@
                   <a:srgbClr val="1B3B6F"/>
                 </a:solidFill>
                 <a:latin typeface="Amiri" pitchFamily="2" charset="-78"/>
+                <a:ea typeface="Amiri" pitchFamily="2" charset="-78"/>
                 <a:cs typeface="Amiri" pitchFamily="2" charset="-78"/>
               </a:rPr>
               <a:t>لَوْ لَمْ تَحْصُلْ عَلَى المِنْحَةِ، هَلْ سَيَتَغَيَّرُ حُلْمُكَ؟</a:t>
@@ -7125,6 +7199,7 @@
                   <a:srgbClr val="D4AF37"/>
                 </a:solidFill>
                 <a:latin typeface="Amiri" pitchFamily="2" charset="-78"/>
+                <a:ea typeface="Amiri" pitchFamily="2" charset="-78"/>
                 <a:cs typeface="Amiri" pitchFamily="2" charset="-78"/>
               </a:rPr>
               <a:t>م</a:t>
@@ -7445,6 +7520,7 @@
                   <a:srgbClr val="8A6D1E"/>
                 </a:solidFill>
                 <a:latin typeface="Amiri" pitchFamily="2" charset="-78"/>
+                <a:ea typeface="Amiri" pitchFamily="2" charset="-78"/>
                 <a:cs typeface="Amiri" pitchFamily="2" charset="-78"/>
               </a:rPr>
               <a:t>وَرَقَةُ المُلَاحِظِ</a:t>
@@ -8915,6 +8991,7 @@
                   <a:srgbClr val="D4AF37"/>
                 </a:solidFill>
                 <a:latin typeface="Amiri" pitchFamily="2" charset="-78"/>
+                <a:ea typeface="Amiri" pitchFamily="2" charset="-78"/>
                 <a:cs typeface="Amiri" pitchFamily="2" charset="-78"/>
               </a:rPr>
               <a:t>م</a:t>
@@ -9235,6 +9312,7 @@
                   <a:srgbClr val="8A6D1E"/>
                 </a:solidFill>
                 <a:latin typeface="Amiri" pitchFamily="2" charset="-78"/>
+                <a:ea typeface="Amiri" pitchFamily="2" charset="-78"/>
                 <a:cs typeface="Amiri" pitchFamily="2" charset="-78"/>
               </a:rPr>
               <a:t>نَمُوذَجُ الإِجَابَةِ</a:t>
@@ -9477,6 +9555,7 @@
                   <a:srgbClr val="1B3B6F"/>
                 </a:solidFill>
                 <a:latin typeface="Amiri" pitchFamily="2" charset="-78"/>
+                <a:ea typeface="Amiri" pitchFamily="2" charset="-78"/>
                 <a:cs typeface="Amiri" pitchFamily="2" charset="-78"/>
               </a:rPr>
               <a:t>أَنَا فِي الصَّفِّ الحَادِي عَشَرَ فِي مَدْرَسَةِ النُّورِ.</a:t>
@@ -9553,6 +9632,7 @@
                   <a:srgbClr val="1B3B6F"/>
                 </a:solidFill>
                 <a:latin typeface="Amiri" pitchFamily="2" charset="-78"/>
+                <a:ea typeface="Amiri" pitchFamily="2" charset="-78"/>
                 <a:cs typeface="Amiri" pitchFamily="2" charset="-78"/>
               </a:rPr>
               <a:t>أَهْلًا! فِي أَيِّ صَفٍّ أَنْتَ؟</a:t>
@@ -9656,6 +9736,7 @@
                   <a:srgbClr val="1B3B6F"/>
                 </a:solidFill>
                 <a:latin typeface="Amiri" pitchFamily="2" charset="-78"/>
+                <a:ea typeface="Amiri" pitchFamily="2" charset="-78"/>
                 <a:cs typeface="Amiri" pitchFamily="2" charset="-78"/>
               </a:rPr>
               <a:t>مَادَّتِيَ المُفَضَّلَةُ الحَاسُوبُ، لِأَنَّهُ مُمْتِعٌ.</a:t>
@@ -9732,6 +9813,7 @@
                   <a:srgbClr val="1B3B6F"/>
                 </a:solidFill>
                 <a:latin typeface="Amiri" pitchFamily="2" charset="-78"/>
+                <a:ea typeface="Amiri" pitchFamily="2" charset="-78"/>
                 <a:cs typeface="Amiri" pitchFamily="2" charset="-78"/>
               </a:rPr>
               <a:t>مَا مَادَّتُكَ المُفَضَّلَةُ؟</a:t>
@@ -9835,6 +9917,7 @@
                   <a:srgbClr val="1B3B6F"/>
                 </a:solidFill>
                 <a:latin typeface="Amiri" pitchFamily="2" charset="-78"/>
+                <a:ea typeface="Amiri" pitchFamily="2" charset="-78"/>
                 <a:cs typeface="Amiri" pitchFamily="2" charset="-78"/>
               </a:rPr>
               <a:t>كَمْ أُسْبُوعًا يَسْتَمِرُّ التَّدْرِيبُ؟</a:t>
@@ -9911,6 +9994,7 @@
                   <a:srgbClr val="1B3B6F"/>
                 </a:solidFill>
                 <a:latin typeface="Amiri" pitchFamily="2" charset="-78"/>
+                <a:ea typeface="Amiri" pitchFamily="2" charset="-78"/>
                 <a:cs typeface="Amiri" pitchFamily="2" charset="-78"/>
               </a:rPr>
               <a:t>شَرِكَتُنَا تُقَدِّمُ تَدْرِيبًا صَيْفِيًّا.</a:t>
@@ -10014,6 +10098,7 @@
                   <a:srgbClr val="1B3B6F"/>
                 </a:solidFill>
                 <a:latin typeface="Amiri" pitchFamily="2" charset="-78"/>
+                <a:ea typeface="Amiri" pitchFamily="2" charset="-78"/>
                 <a:cs typeface="Amiri" pitchFamily="2" charset="-78"/>
               </a:rPr>
               <a:t>أُرِيدُ أَنْ أَكُونَ مُصَمِّمَ أَلْعَابٍ.</a:t>
@@ -10090,6 +10175,7 @@
                   <a:srgbClr val="1B3B6F"/>
                 </a:solidFill>
                 <a:latin typeface="Amiri" pitchFamily="2" charset="-78"/>
+                <a:ea typeface="Amiri" pitchFamily="2" charset="-78"/>
                 <a:cs typeface="Amiri" pitchFamily="2" charset="-78"/>
               </a:rPr>
               <a:t>أَرْبَعَةُ أَسَابِيعَ. مَاذَا تُرِيدُ أَنْ تَعْمَلَ فِي المُسْتَقْبَلِ؟</a:t>
@@ -10193,6 +10279,7 @@
                   <a:srgbClr val="1B3B6F"/>
                 </a:solidFill>
                 <a:latin typeface="Amiri" pitchFamily="2" charset="-78"/>
+                <a:ea typeface="Amiri" pitchFamily="2" charset="-78"/>
                 <a:cs typeface="Amiri" pitchFamily="2" charset="-78"/>
               </a:rPr>
               <a:t>نَعَمْ، عَمِلْتُ فِي مَحَلٍّ لِلْحَوَاسِيبِ أُسْبُوعًا وَاحِدًا.</a:t>
@@ -10269,6 +10356,7 @@
                   <a:srgbClr val="1B3B6F"/>
                 </a:solidFill>
                 <a:latin typeface="Amiri" pitchFamily="2" charset="-78"/>
+                <a:ea typeface="Amiri" pitchFamily="2" charset="-78"/>
                 <a:cs typeface="Amiri" pitchFamily="2" charset="-78"/>
               </a:rPr>
               <a:t>هَلْ عِنْدَكَ خِبْرَةُ عَمَلٍ؟</a:t>
@@ -10478,6 +10566,7 @@
                   <a:srgbClr val="D4AF37"/>
                 </a:solidFill>
                 <a:latin typeface="Amiri" pitchFamily="2" charset="-78"/>
+                <a:ea typeface="Amiri" pitchFamily="2" charset="-78"/>
                 <a:cs typeface="Amiri" pitchFamily="2" charset="-78"/>
               </a:rPr>
               <a:t>م</a:t>
@@ -10798,6 +10887,7 @@
                   <a:srgbClr val="8A6D1E"/>
                 </a:solidFill>
                 <a:latin typeface="Amiri" pitchFamily="2" charset="-78"/>
+                <a:ea typeface="Amiri" pitchFamily="2" charset="-78"/>
                 <a:cs typeface="Amiri" pitchFamily="2" charset="-78"/>
               </a:rPr>
               <a:t>نَمُوذَجُ الإِجَابَةِ</a:t>
@@ -11040,6 +11130,7 @@
                   <a:srgbClr val="1B3B6F"/>
                 </a:solidFill>
                 <a:latin typeface="Amiri" pitchFamily="2" charset="-78"/>
+                <a:ea typeface="Amiri" pitchFamily="2" charset="-78"/>
                 <a:cs typeface="Amiri" pitchFamily="2" charset="-78"/>
               </a:rPr>
               <a:t>نَعَمْ! أَعْمَلُ فِي مَكْتَبَةٍ يَوْمَ السَّبْتِ.</a:t>
@@ -11116,6 +11207,7 @@
                   <a:srgbClr val="1B3B6F"/>
                 </a:solidFill>
                 <a:latin typeface="Amiri" pitchFamily="2" charset="-78"/>
+                <a:ea typeface="Amiri" pitchFamily="2" charset="-78"/>
                 <a:cs typeface="Amiri" pitchFamily="2" charset="-78"/>
               </a:rPr>
               <a:t>(صَدِيقٌ) أَهْلًا! سَمِعْتُ أَنَّكَ وَجَدْتَ عَمَلًا!</a:t>
@@ -11219,6 +11311,7 @@
                   <a:srgbClr val="1B3B6F"/>
                 </a:solidFill>
                 <a:latin typeface="Amiri" pitchFamily="2" charset="-78"/>
+                <a:ea typeface="Amiri" pitchFamily="2" charset="-78"/>
                 <a:cs typeface="Amiri" pitchFamily="2" charset="-78"/>
               </a:rPr>
               <a:t>العَمَلُ مُمْتِعٌ، لٰكِنَّ السَّاعَاتِ طَوِيلَةٌ قَلِيلًا.</a:t>
@@ -11295,6 +11388,7 @@
                   <a:srgbClr val="1B3B6F"/>
                 </a:solidFill>
                 <a:latin typeface="Amiri" pitchFamily="2" charset="-78"/>
+                <a:ea typeface="Amiri" pitchFamily="2" charset="-78"/>
                 <a:cs typeface="Amiri" pitchFamily="2" charset="-78"/>
               </a:rPr>
               <a:t>وَكَيْفَ العَمَلُ؟</a:t>
@@ -11398,6 +11492,7 @@
                   <a:srgbClr val="1B3B6F"/>
                 </a:solidFill>
                 <a:latin typeface="Amiri" pitchFamily="2" charset="-78"/>
+                <a:ea typeface="Amiri" pitchFamily="2" charset="-78"/>
                 <a:cs typeface="Amiri" pitchFamily="2" charset="-78"/>
               </a:rPr>
               <a:t>صَبَاحَ النُّورِ. يَسُرُّنِي ذٰلِكَ، لٰكِنْ عِنْدِي امْتِحَانَاتٌ هٰذَا الشَّهْرَ.</a:t>
@@ -11477,6 +11572,7 @@
                   <a:srgbClr val="1B3B6F"/>
                 </a:solidFill>
                 <a:latin typeface="Amiri" pitchFamily="2" charset="-78"/>
+                <a:ea typeface="Amiri" pitchFamily="2" charset="-78"/>
                 <a:cs typeface="Amiri" pitchFamily="2" charset="-78"/>
               </a:rPr>
               <a:t>(المُدِيرُ) صَبَاحَ الخَيْرِ. هَلْ يُمْكِنُكَ أَنْ تَعْمَلَ يَوْمَ الأَحَدِ أَيْضًا؟</a:t>
@@ -11580,6 +11676,7 @@
                   <a:srgbClr val="1B3B6F"/>
                 </a:solidFill>
                 <a:latin typeface="Amiri" pitchFamily="2" charset="-78"/>
+                <a:ea typeface="Amiri" pitchFamily="2" charset="-78"/>
                 <a:cs typeface="Amiri" pitchFamily="2" charset="-78"/>
               </a:rPr>
               <a:t>تَنْتَهِي فِي آخِرِ الشَّهْرِ. هَلْ يُمْكِنُنِي أَنْ أَبْدَأَ أَيَّامَ الأَحَدِ بَعْدَ ذٰلِكَ؟</a:t>
@@ -11656,6 +11753,7 @@
                   <a:srgbClr val="1B3B6F"/>
                 </a:solidFill>
                 <a:latin typeface="Amiri" pitchFamily="2" charset="-78"/>
+                <a:ea typeface="Amiri" pitchFamily="2" charset="-78"/>
                 <a:cs typeface="Amiri" pitchFamily="2" charset="-78"/>
               </a:rPr>
               <a:t>أَفْهَمُ. مَتَى تَنْتَهِي امْتِحَانَاتُكَ؟</a:t>
@@ -11759,6 +11857,7 @@
                   <a:srgbClr val="1B3B6F"/>
                 </a:solidFill>
                 <a:latin typeface="Amiri" pitchFamily="2" charset="-78"/>
+                <a:ea typeface="Amiri" pitchFamily="2" charset="-78"/>
                 <a:cs typeface="Amiri" pitchFamily="2" charset="-78"/>
               </a:rPr>
               <a:t>سَأَدْرُسُ الأَدَبَ الإِنْجْلِيزِيَّ، لِأَنِّي أَطْمَحُ إِلَى أَنْ أَعْمَلَ فِي دَارِ نَشْرٍ.</a:t>
@@ -11835,6 +11934,7 @@
                   <a:srgbClr val="1B3B6F"/>
                 </a:solidFill>
                 <a:latin typeface="Amiri" pitchFamily="2" charset="-78"/>
+                <a:ea typeface="Amiri" pitchFamily="2" charset="-78"/>
                 <a:cs typeface="Amiri" pitchFamily="2" charset="-78"/>
               </a:rPr>
               <a:t>طَبْعًا. وَمَاذَا سَتَدْرُسُ بَعْدَ المَدْرَسَةِ؟</a:t>
@@ -12044,6 +12144,7 @@
                   <a:srgbClr val="D4AF37"/>
                 </a:solidFill>
                 <a:latin typeface="Amiri" pitchFamily="2" charset="-78"/>
+                <a:ea typeface="Amiri" pitchFamily="2" charset="-78"/>
                 <a:cs typeface="Amiri" pitchFamily="2" charset="-78"/>
               </a:rPr>
               <a:t>م</a:t>
@@ -12364,6 +12465,7 @@
                   <a:srgbClr val="8A6D1E"/>
                 </a:solidFill>
                 <a:latin typeface="Amiri" pitchFamily="2" charset="-78"/>
+                <a:ea typeface="Amiri" pitchFamily="2" charset="-78"/>
                 <a:cs typeface="Amiri" pitchFamily="2" charset="-78"/>
               </a:rPr>
               <a:t>نَمُوذَجُ الإِجَابَةِ</a:t>
@@ -12606,6 +12708,7 @@
                   <a:srgbClr val="1B3B6F"/>
                 </a:solidFill>
                 <a:latin typeface="Amiri" pitchFamily="2" charset="-78"/>
+                <a:ea typeface="Amiri" pitchFamily="2" charset="-78"/>
                 <a:cs typeface="Amiri" pitchFamily="2" charset="-78"/>
               </a:rPr>
               <a:t>فِي الثَّانَوِيَّةِ كُنْتُ أُحِبُّ العُلُومَ، أَمَّا الآنَ فَأَدْرُسُ الكِيمْيَاءَ وَالأَحْيَاءَ وَالرِّيَاضِيَّاتِ، وَأُرَاجِعُ كُلَّ يَوْمٍ سَاعَتَيْنِ.</a:t>
@@ -12682,6 +12785,7 @@
                   <a:srgbClr val="1B3B6F"/>
                 </a:solidFill>
                 <a:latin typeface="Amiri" pitchFamily="2" charset="-78"/>
+                <a:ea typeface="Amiri" pitchFamily="2" charset="-78"/>
                 <a:cs typeface="Amiri" pitchFamily="2" charset="-78"/>
               </a:rPr>
               <a:t>حَدِّثْنِي عَنْ دِرَاسَتِكَ.</a:t>
@@ -12785,6 +12889,7 @@
                   <a:srgbClr val="1B3B6F"/>
                 </a:solidFill>
                 <a:latin typeface="Amiri" pitchFamily="2" charset="-78"/>
+                <a:ea typeface="Amiri" pitchFamily="2" charset="-78"/>
                 <a:cs typeface="Amiri" pitchFamily="2" charset="-78"/>
               </a:rPr>
               <a:t>أَوَّلًا، حَصَلْتُ عَلَى شَهَادَةٍ فِي الإِسْعَافَاتِ الأَوَّلِيَّةِ؛ بِالإِضَافَةِ إِلَى ذٰلِكَ، أَتَطَوَّعُ فِي دَارٍ لِلْمُسِنِّينَ، فَتَعَلَّمْتُ الصَّبْرَ وَالاسْتِمَاعَ.</a:t>
@@ -12861,6 +12966,7 @@
                   <a:srgbClr val="1B3B6F"/>
                 </a:solidFill>
                 <a:latin typeface="Amiri" pitchFamily="2" charset="-78"/>
+                <a:ea typeface="Amiri" pitchFamily="2" charset="-78"/>
                 <a:cs typeface="Amiri" pitchFamily="2" charset="-78"/>
               </a:rPr>
               <a:t>وَمَا المَهَارَاتُ الَّتِي اكْتَسَبْتَهَا خَارِجَ المَدْرَسَةِ؟</a:t>
@@ -12964,6 +13070,7 @@
                   <a:srgbClr val="1B3B6F"/>
                 </a:solidFill>
                 <a:latin typeface="Amiri" pitchFamily="2" charset="-78"/>
+                <a:ea typeface="Amiri" pitchFamily="2" charset="-78"/>
                 <a:cs typeface="Amiri" pitchFamily="2" charset="-78"/>
               </a:rPr>
               <a:t>الوَظِيفَةُ الَّتِي تُنَاسِبُنِي هِيَ الصَّيْدَلَةُ، لِأَنَّهَا تَجْمَعُ بَيْنَ العِلْمِ وَمُسَاعَدَةِ النَّاسِ.</a:t>
@@ -13040,6 +13147,7 @@
                   <a:srgbClr val="1B3B6F"/>
                 </a:solidFill>
                 <a:latin typeface="Amiri" pitchFamily="2" charset="-78"/>
+                <a:ea typeface="Amiri" pitchFamily="2" charset="-78"/>
                 <a:cs typeface="Amiri" pitchFamily="2" charset="-78"/>
               </a:rPr>
               <a:t>مَا الوَظِيفَةُ الَّتِي تُنَاسِبُ هٰذِهِ المَهَارَاتِ؟</a:t>
@@ -13143,6 +13251,7 @@
                   <a:srgbClr val="1B3B6F"/>
                 </a:solidFill>
                 <a:latin typeface="Amiri" pitchFamily="2" charset="-78"/>
+                <a:ea typeface="Amiri" pitchFamily="2" charset="-78"/>
                 <a:cs typeface="Amiri" pitchFamily="2" charset="-78"/>
               </a:rPr>
               <a:t>نَعَمْ، سَأَتَقَدَّمُ لِتَدْرِيبٍ فِي صَيْدَلِيَّةِ المُسْتَشْفَى، لِكَيْ أَرَى العَمَلَ الحَقِيقِيَّ قَبْلَ الجَامِعَةِ.</a:t>
@@ -13219,6 +13328,7 @@
                   <a:srgbClr val="1B3B6F"/>
                 </a:solidFill>
                 <a:latin typeface="Amiri" pitchFamily="2" charset="-78"/>
+                <a:ea typeface="Amiri" pitchFamily="2" charset="-78"/>
                 <a:cs typeface="Amiri" pitchFamily="2" charset="-78"/>
               </a:rPr>
               <a:t>هَلْ سَتَبْحَثُ عَنْ خِبْرَةِ عَمَلٍ هٰذَا الصَّيْفَ؟</a:t>
@@ -13322,6 +13432,7 @@
                   <a:srgbClr val="1B3B6F"/>
                 </a:solidFill>
                 <a:latin typeface="Amiri" pitchFamily="2" charset="-78"/>
+                <a:ea typeface="Amiri" pitchFamily="2" charset="-78"/>
                 <a:cs typeface="Amiri" pitchFamily="2" charset="-78"/>
               </a:rPr>
               <a:t>إِذَا لَمْ أَجِدْ تَدْرِيبًا، فَسَوْفَ أَعْمَلُ فِي صَيْدَلِيَّةِ الحَيِّ، وَمَعَ ذٰلِكَ سَأُوَاصِلُ التَّطَوُّعَ.</a:t>
@@ -13398,6 +13509,7 @@
                   <a:srgbClr val="1B3B6F"/>
                 </a:solidFill>
                 <a:latin typeface="Amiri" pitchFamily="2" charset="-78"/>
+                <a:ea typeface="Amiri" pitchFamily="2" charset="-78"/>
                 <a:cs typeface="Amiri" pitchFamily="2" charset="-78"/>
               </a:rPr>
               <a:t>وَإِذَا لَمْ تَجِدْ تَدْرِيبًا؟</a:t>
@@ -13607,6 +13719,7 @@
                   <a:srgbClr val="D4AF37"/>
                 </a:solidFill>
                 <a:latin typeface="Amiri" pitchFamily="2" charset="-78"/>
+                <a:ea typeface="Amiri" pitchFamily="2" charset="-78"/>
                 <a:cs typeface="Amiri" pitchFamily="2" charset="-78"/>
               </a:rPr>
               <a:t>م</a:t>
@@ -13927,6 +14040,7 @@
                   <a:srgbClr val="8A6D1E"/>
                 </a:solidFill>
                 <a:latin typeface="Amiri" pitchFamily="2" charset="-78"/>
+                <a:ea typeface="Amiri" pitchFamily="2" charset="-78"/>
                 <a:cs typeface="Amiri" pitchFamily="2" charset="-78"/>
               </a:rPr>
               <a:t>نَمُوذَجُ الإِجَابَةِ</a:t>
@@ -14172,6 +14286,7 @@
                   <a:srgbClr val="1B3B6F"/>
                 </a:solidFill>
                 <a:latin typeface="Amiri" pitchFamily="2" charset="-78"/>
+                <a:ea typeface="Amiri" pitchFamily="2" charset="-78"/>
                 <a:cs typeface="Amiri" pitchFamily="2" charset="-78"/>
               </a:rPr>
               <a:t>يَسُرُّنِي أَنْ أَكُونَ هُنَا. أَرَى أَنَّنِي أَسْتَحِقُّهَا لِأَنِّي أَجْمَعُ بَيْنَ التَّفَوُّقِ وَخِدْمَةِ المُجْتَمَعِ؛ وَالدَّلِيلُ أَنَّنِي حَصَلْتُ عَلَى أَعْلَى الدَّرَجَاتِ، وَأَسَّسْتُ نَادِيًا لِلدُّرُوسِ المَجَّانِيَّةِ.</a:t>
@@ -14248,6 +14363,7 @@
                   <a:srgbClr val="1B3B6F"/>
                 </a:solidFill>
                 <a:latin typeface="Amiri" pitchFamily="2" charset="-78"/>
+                <a:ea typeface="Amiri" pitchFamily="2" charset="-78"/>
                 <a:cs typeface="Amiri" pitchFamily="2" charset="-78"/>
               </a:rPr>
               <a:t>لِمَاذَا تَسْتَحِقُّ هٰذِهِ المِنْحَةَ؟</a:t>
@@ -14354,6 +14470,7 @@
                   <a:srgbClr val="1B3B6F"/>
                 </a:solidFill>
                 <a:latin typeface="Amiri" pitchFamily="2" charset="-78"/>
+                <a:ea typeface="Amiri" pitchFamily="2" charset="-78"/>
                 <a:cs typeface="Amiri" pitchFamily="2" charset="-78"/>
               </a:rPr>
               <a:t>عِنْدَمَا انْتَقَلْنَا إِلَى بَرِيطَانْيَا، لَمْ أَكُنْ أَتَكَلَّمُ الإِنْجْلِيزِيَّةَ جَيِّدًا، فَكُنْتُ أَدْرُسُ ثَلَاثَ سَاعَاتٍ إِضَافِيَّةً كُلَّ يَوْمٍ، حَتَّى أَصْبَحْتُ مِنَ الأَوَائِلِ فِي صَفِّي.</a:t>
@@ -14430,6 +14547,7 @@
                   <a:srgbClr val="1B3B6F"/>
                 </a:solidFill>
                 <a:latin typeface="Amiri" pitchFamily="2" charset="-78"/>
+                <a:ea typeface="Amiri" pitchFamily="2" charset="-78"/>
                 <a:cs typeface="Amiri" pitchFamily="2" charset="-78"/>
               </a:rPr>
               <a:t>مَا أَكْبَرُ تَحَدٍّ وَاجَهْتَهُ فِي دِرَاسَتِكَ؟</a:t>
@@ -14533,6 +14651,7 @@
                   <a:srgbClr val="1B3B6F"/>
                 </a:solidFill>
                 <a:latin typeface="Amiri" pitchFamily="2" charset="-78"/>
+                <a:ea typeface="Amiri" pitchFamily="2" charset="-78"/>
                 <a:cs typeface="Amiri" pitchFamily="2" charset="-78"/>
               </a:rPr>
               <a:t>صَحِيحٌ أَنَّ الدَّرَجَاتِ تَفْتَحُ أَبْوَابَ الجَامِعَاتِ، غَيْرَ أَنَّ المَهَارَاتِ هِيَ الَّتِي تَفْتَحُ أَبْوَابَ العَمَلِ؛ لِذٰلِكَ حَرَصْتُ عَلَى الاثْنَيْنِ.</a:t>
@@ -14609,6 +14728,7 @@
                   <a:srgbClr val="1B3B6F"/>
                 </a:solidFill>
                 <a:latin typeface="Amiri" pitchFamily="2" charset="-78"/>
+                <a:ea typeface="Amiri" pitchFamily="2" charset="-78"/>
                 <a:cs typeface="Amiri" pitchFamily="2" charset="-78"/>
               </a:rPr>
               <a:t>هَلِ الدَّرَجَاتُ أَهَمُّ مِنَ المَهَارَاتِ؟</a:t>
@@ -14712,6 +14832,7 @@
                   <a:srgbClr val="1B3B6F"/>
                 </a:solidFill>
                 <a:latin typeface="Amiri" pitchFamily="2" charset="-78"/>
+                <a:ea typeface="Amiri" pitchFamily="2" charset="-78"/>
                 <a:cs typeface="Amiri" pitchFamily="2" charset="-78"/>
               </a:rPr>
               <a:t>سَأَدْرُسُ الهَنْدَسَةَ الطِّبِّيَّةَ، ثُمَّ أَطْمَحُ إِلَى أَنْ أُصَمِّمَ أَجْهِزَةً رَخِيصَةً لِلْمُسْتَشْفَيَاتِ الفَقِيرَةِ، لِكَيْ يَحْصُلَ الجَمِيعُ عَلَى العِلَاجِ.</a:t>
@@ -14788,6 +14909,7 @@
                   <a:srgbClr val="1B3B6F"/>
                 </a:solidFill>
                 <a:latin typeface="Amiri" pitchFamily="2" charset="-78"/>
+                <a:ea typeface="Amiri" pitchFamily="2" charset="-78"/>
                 <a:cs typeface="Amiri" pitchFamily="2" charset="-78"/>
               </a:rPr>
               <a:t>كَيْفَ سَتَسْتَخْدِمُ المِنْحَةَ؟</a:t>
@@ -14891,6 +15013,7 @@
                   <a:srgbClr val="1B3B6F"/>
                 </a:solidFill>
                 <a:latin typeface="Amiri" pitchFamily="2" charset="-78"/>
+                <a:ea typeface="Amiri" pitchFamily="2" charset="-78"/>
                 <a:cs typeface="Amiri" pitchFamily="2" charset="-78"/>
               </a:rPr>
               <a:t>لَوْ لَمْ أَحْصُلْ عَلَيْهَا، لَعَمِلْتُ وَدَرَسْتُ فِي الوَقْتِ نَفْسِهِ؛ فَالطَّرِيقُ سَيَكُونُ أَطْوَلَ، لٰكِنَّ الحُلْمَ لَنْ يَتَغَيَّرَ.</a:t>
@@ -14967,6 +15090,7 @@
                   <a:srgbClr val="1B3B6F"/>
                 </a:solidFill>
                 <a:latin typeface="Amiri" pitchFamily="2" charset="-78"/>
+                <a:ea typeface="Amiri" pitchFamily="2" charset="-78"/>
                 <a:cs typeface="Amiri" pitchFamily="2" charset="-78"/>
               </a:rPr>
               <a:t>لَوْ لَمْ تَحْصُلْ عَلَى المِنْحَةِ، هَلْ سَيَتَغَيَّرُ حُلْمُكَ؟</a:t>
@@ -15176,6 +15300,7 @@
                   <a:srgbClr val="D4AF37"/>
                 </a:solidFill>
                 <a:latin typeface="Amiri" pitchFamily="2" charset="-78"/>
+                <a:ea typeface="Amiri" pitchFamily="2" charset="-78"/>
                 <a:cs typeface="Amiri" pitchFamily="2" charset="-78"/>
               </a:rPr>
               <a:t>م</a:t>
@@ -15496,6 +15621,7 @@
                   <a:srgbClr val="8A6D1E"/>
                 </a:solidFill>
                 <a:latin typeface="Amiri" pitchFamily="2" charset="-78"/>
+                <a:ea typeface="Amiri" pitchFamily="2" charset="-78"/>
                 <a:cs typeface="Amiri" pitchFamily="2" charset="-78"/>
               </a:rPr>
               <a:t>الدِّرَاسَةُ وَالعَمَلُ</a:t>
@@ -15776,6 +15902,7 @@
                   <a:srgbClr val="1B3B6F"/>
                 </a:solidFill>
                 <a:latin typeface="Amiri" pitchFamily="2" charset="-78"/>
+                <a:ea typeface="Amiri" pitchFamily="2" charset="-78"/>
                 <a:cs typeface="Amiri" pitchFamily="2" charset="-78"/>
               </a:rPr>
               <a:t>مَادَّتِي المُفَضَّلَةُ … لِأَنَّ …</a:t>
@@ -15852,6 +15979,7 @@
                   <a:srgbClr val="1B3B6F"/>
                 </a:solidFill>
                 <a:latin typeface="Amiri" pitchFamily="2" charset="-78"/>
+                <a:ea typeface="Amiri" pitchFamily="2" charset="-78"/>
                 <a:cs typeface="Amiri" pitchFamily="2" charset="-78"/>
               </a:rPr>
               <a:t>مَا مَادَّتُكَ المُفَضَّلَةُ؟</a:t>
@@ -16020,6 +16148,7 @@
                   <a:srgbClr val="1B3B6F"/>
                 </a:solidFill>
                 <a:latin typeface="Amiri" pitchFamily="2" charset="-78"/>
+                <a:ea typeface="Amiri" pitchFamily="2" charset="-78"/>
                 <a:cs typeface="Amiri" pitchFamily="2" charset="-78"/>
               </a:rPr>
               <a:t>أُرَاجِعُ … وَأَكْتُبُ …</a:t>
@@ -16096,6 +16225,7 @@
                   <a:srgbClr val="1B3B6F"/>
                 </a:solidFill>
                 <a:latin typeface="Amiri" pitchFamily="2" charset="-78"/>
+                <a:ea typeface="Amiri" pitchFamily="2" charset="-78"/>
                 <a:cs typeface="Amiri" pitchFamily="2" charset="-78"/>
               </a:rPr>
               <a:t>كَيْفَ تُرَاجِعُ لِلِامْتِحَانَاتِ؟</a:t>
@@ -16264,6 +16394,7 @@
                   <a:srgbClr val="1B3B6F"/>
                 </a:solidFill>
                 <a:latin typeface="Amiri" pitchFamily="2" charset="-78"/>
+                <a:ea typeface="Amiri" pitchFamily="2" charset="-78"/>
                 <a:cs typeface="Amiri" pitchFamily="2" charset="-78"/>
               </a:rPr>
               <a:t>أَبِي / أُمِّي …</a:t>
@@ -16340,6 +16471,7 @@
                   <a:srgbClr val="1B3B6F"/>
                 </a:solidFill>
                 <a:latin typeface="Amiri" pitchFamily="2" charset="-78"/>
+                <a:ea typeface="Amiri" pitchFamily="2" charset="-78"/>
                 <a:cs typeface="Amiri" pitchFamily="2" charset="-78"/>
               </a:rPr>
               <a:t>مَاذَا يَعْمَلُ أَحَدُ أَفْرَادِ أُسْرَتِكَ؟</a:t>
@@ -16508,6 +16640,7 @@
                   <a:srgbClr val="1B3B6F"/>
                 </a:solidFill>
                 <a:latin typeface="Amiri" pitchFamily="2" charset="-78"/>
+                <a:ea typeface="Amiri" pitchFamily="2" charset="-78"/>
                 <a:cs typeface="Amiri" pitchFamily="2" charset="-78"/>
               </a:rPr>
               <a:t>نَعَمْ، أَعْمَلُ … / لَا، …</a:t>
@@ -16584,6 +16717,7 @@
                   <a:srgbClr val="1B3B6F"/>
                 </a:solidFill>
                 <a:latin typeface="Amiri" pitchFamily="2" charset="-78"/>
+                <a:ea typeface="Amiri" pitchFamily="2" charset="-78"/>
                 <a:cs typeface="Amiri" pitchFamily="2" charset="-78"/>
               </a:rPr>
               <a:t>هَلْ عِنْدَكَ عَمَلٌ جُزْئِيٌّ؟</a:t>
@@ -16752,6 +16886,7 @@
                   <a:srgbClr val="1B3B6F"/>
                 </a:solidFill>
                 <a:latin typeface="Amiri" pitchFamily="2" charset="-78"/>
+                <a:ea typeface="Amiri" pitchFamily="2" charset="-78"/>
                 <a:cs typeface="Amiri" pitchFamily="2" charset="-78"/>
               </a:rPr>
               <a:t>سَأَدْرُسُ …</a:t>
@@ -16828,6 +16963,7 @@
                   <a:srgbClr val="1B3B6F"/>
                 </a:solidFill>
                 <a:latin typeface="Amiri" pitchFamily="2" charset="-78"/>
+                <a:ea typeface="Amiri" pitchFamily="2" charset="-78"/>
                 <a:cs typeface="Amiri" pitchFamily="2" charset="-78"/>
               </a:rPr>
               <a:t>مَاذَا سَتَفْعَلُ بَعْدَ المَدْرَسَةِ؟</a:t>
@@ -16982,6 +17118,7 @@
                   <a:srgbClr val="1B3B6F"/>
                 </a:solidFill>
                 <a:latin typeface="Amiri" pitchFamily="2" charset="-78"/>
+                <a:ea typeface="Amiri" pitchFamily="2" charset="-78"/>
                 <a:cs typeface="Amiri" pitchFamily="2" charset="-78"/>
               </a:rPr>
               <a:t>عَفْوًا، هَلْ يُمْكِنُ أَنْ تُعِيدَ السُّؤَالَ؟</a:t>
@@ -17115,6 +17252,7 @@
                   <a:srgbClr val="D4AF37"/>
                 </a:solidFill>
                 <a:latin typeface="Amiri" pitchFamily="2" charset="-78"/>
+                <a:ea typeface="Amiri" pitchFamily="2" charset="-78"/>
                 <a:cs typeface="Amiri" pitchFamily="2" charset="-78"/>
               </a:rPr>
               <a:t>م</a:t>
@@ -17435,6 +17573,7 @@
                   <a:srgbClr val="8A6D1E"/>
                 </a:solidFill>
                 <a:latin typeface="Amiri" pitchFamily="2" charset="-78"/>
+                <a:ea typeface="Amiri" pitchFamily="2" charset="-78"/>
                 <a:cs typeface="Amiri" pitchFamily="2" charset="-78"/>
               </a:rPr>
               <a:t>مِنَ المَدْرَسَةِ إِلَى العَمَلِ</a:t>
@@ -17715,6 +17854,7 @@
                   <a:srgbClr val="1B3B6F"/>
                 </a:solidFill>
                 <a:latin typeface="Amiri" pitchFamily="2" charset="-78"/>
+                <a:ea typeface="Amiri" pitchFamily="2" charset="-78"/>
                 <a:cs typeface="Amiri" pitchFamily="2" charset="-78"/>
               </a:rPr>
               <a:t>كُنْتُ … أَمَّا الآنَ فَأَدْرُسُ … وَسَأَخْتَارُ …</a:t>
@@ -17791,6 +17931,7 @@
                   <a:srgbClr val="1B3B6F"/>
                 </a:solidFill>
                 <a:latin typeface="Amiri" pitchFamily="2" charset="-78"/>
+                <a:ea typeface="Amiri" pitchFamily="2" charset="-78"/>
                 <a:cs typeface="Amiri" pitchFamily="2" charset="-78"/>
               </a:rPr>
               <a:t>كَيْفَ تَغَيَّرَتْ دِرَاسَتُكَ مُنْذُ الابْتِدَائِيَّةِ؟</a:t>
@@ -17894,6 +18035,7 @@
                   <a:srgbClr val="1B3B6F"/>
                 </a:solidFill>
                 <a:latin typeface="Amiri" pitchFamily="2" charset="-78"/>
+                <a:ea typeface="Amiri" pitchFamily="2" charset="-78"/>
                 <a:cs typeface="Amiri" pitchFamily="2" charset="-78"/>
               </a:rPr>
               <a:t>أَوَّلًا … بِالإِضَافَةِ إِلَى ذٰلِكَ …</a:t>
@@ -17970,6 +18112,7 @@
                   <a:srgbClr val="1B3B6F"/>
                 </a:solidFill>
                 <a:latin typeface="Amiri" pitchFamily="2" charset="-78"/>
+                <a:ea typeface="Amiri" pitchFamily="2" charset="-78"/>
                 <a:cs typeface="Amiri" pitchFamily="2" charset="-78"/>
               </a:rPr>
               <a:t>مَا المَهَارَاتُ الَّتِي يَطْلُبُهَا أَصْحَابُ العَمَلِ؟</a:t>
@@ -18073,6 +18216,7 @@
                   <a:srgbClr val="1B3B6F"/>
                 </a:solidFill>
                 <a:latin typeface="Amiri" pitchFamily="2" charset="-78"/>
+                <a:ea typeface="Amiri" pitchFamily="2" charset="-78"/>
                 <a:cs typeface="Amiri" pitchFamily="2" charset="-78"/>
               </a:rPr>
               <a:t>فِي … تَطَوَّعْتُ … فَتَعَلَّمْتُ …</a:t>
@@ -18149,6 +18293,7 @@
                   <a:srgbClr val="1B3B6F"/>
                 </a:solidFill>
                 <a:latin typeface="Amiri" pitchFamily="2" charset="-78"/>
+                <a:ea typeface="Amiri" pitchFamily="2" charset="-78"/>
                 <a:cs typeface="Amiri" pitchFamily="2" charset="-78"/>
               </a:rPr>
               <a:t>صِفْ تَجْرِبَةَ عَمَلٍ أَوْ تَطَوُّعٍ.</a:t>
@@ -18252,6 +18397,7 @@
                   <a:srgbClr val="1B3B6F"/>
                 </a:solidFill>
                 <a:latin typeface="Amiri" pitchFamily="2" charset="-78"/>
+                <a:ea typeface="Amiri" pitchFamily="2" charset="-78"/>
                 <a:cs typeface="Amiri" pitchFamily="2" charset="-78"/>
               </a:rPr>
               <a:t>أَرَى أَنَّ … لٰكِنَّ … لِذٰلِكَ …</a:t>
@@ -18328,6 +18474,7 @@
                   <a:srgbClr val="1B3B6F"/>
                 </a:solidFill>
                 <a:latin typeface="Amiri" pitchFamily="2" charset="-78"/>
+                <a:ea typeface="Amiri" pitchFamily="2" charset="-78"/>
                 <a:cs typeface="Amiri" pitchFamily="2" charset="-78"/>
               </a:rPr>
               <a:t>أَيُّهُمَا أَهَمُّ: الجَامِعَةُ أَمِ الخِبْرَةُ؟</a:t>
@@ -18431,6 +18578,7 @@
                   <a:srgbClr val="1B3B6F"/>
                 </a:solidFill>
                 <a:latin typeface="Amiri" pitchFamily="2" charset="-78"/>
+                <a:ea typeface="Amiri" pitchFamily="2" charset="-78"/>
                 <a:cs typeface="Amiri" pitchFamily="2" charset="-78"/>
               </a:rPr>
               <a:t>أَطْمَحُ إِلَى أَنْ … وَإِذَا …</a:t>
@@ -18507,6 +18655,7 @@
                   <a:srgbClr val="1B3B6F"/>
                 </a:solidFill>
                 <a:latin typeface="Amiri" pitchFamily="2" charset="-78"/>
+                <a:ea typeface="Amiri" pitchFamily="2" charset="-78"/>
                 <a:cs typeface="Amiri" pitchFamily="2" charset="-78"/>
               </a:rPr>
               <a:t>أَيْنَ تَرَى نَفْسَكَ بَعْدَ عَشْرِ سَنَوَاتٍ؟</a:t>
@@ -18716,6 +18865,7 @@
                   <a:srgbClr val="D4AF37"/>
                 </a:solidFill>
                 <a:latin typeface="Amiri" pitchFamily="2" charset="-78"/>
+                <a:ea typeface="Amiri" pitchFamily="2" charset="-78"/>
                 <a:cs typeface="Amiri" pitchFamily="2" charset="-78"/>
               </a:rPr>
               <a:t>م</a:t>
@@ -19036,6 +19186,7 @@
                   <a:srgbClr val="8A6D1E"/>
                 </a:solidFill>
                 <a:latin typeface="Amiri" pitchFamily="2" charset="-78"/>
+                <a:ea typeface="Amiri" pitchFamily="2" charset="-78"/>
                 <a:cs typeface="Amiri" pitchFamily="2" charset="-78"/>
               </a:rPr>
               <a:t>التَّعْلِيمُ وَالعَمَلُ وَالمُسْتَقْبَلُ</a:t>
@@ -19316,6 +19467,7 @@
                   <a:srgbClr val="1B3B6F"/>
                 </a:solidFill>
                 <a:latin typeface="Amiri" pitchFamily="2" charset="-78"/>
+                <a:ea typeface="Amiri" pitchFamily="2" charset="-78"/>
                 <a:cs typeface="Amiri" pitchFamily="2" charset="-78"/>
               </a:rPr>
               <a:t>صَحِيحٌ أَنَّ … غَيْرَ أَنَّ …</a:t>
@@ -19392,6 +19544,7 @@
                   <a:srgbClr val="1B3B6F"/>
                 </a:solidFill>
                 <a:latin typeface="Amiri" pitchFamily="2" charset="-78"/>
+                <a:ea typeface="Amiri" pitchFamily="2" charset="-78"/>
                 <a:cs typeface="Amiri" pitchFamily="2" charset="-78"/>
               </a:rPr>
               <a:t>هَلْ تُعِدُّ المَدَارِسُ الطُّلَّابَ لِعَالَمِ العَمَلِ؟</a:t>
@@ -19495,6 +19648,7 @@
                   <a:srgbClr val="1B3B6F"/>
                 </a:solidFill>
                 <a:latin typeface="Amiri" pitchFamily="2" charset="-78"/>
+                <a:ea typeface="Amiri" pitchFamily="2" charset="-78"/>
                 <a:cs typeface="Amiri" pitchFamily="2" charset="-78"/>
               </a:rPr>
               <a:t>مِنْ نَاحِيَةٍ … وَمِنْ نَاحِيَةٍ أُخْرَى …</a:t>
@@ -19571,6 +19725,7 @@
                   <a:srgbClr val="1B3B6F"/>
                 </a:solidFill>
                 <a:latin typeface="Amiri" pitchFamily="2" charset="-78"/>
+                <a:ea typeface="Amiri" pitchFamily="2" charset="-78"/>
                 <a:cs typeface="Amiri" pitchFamily="2" charset="-78"/>
               </a:rPr>
               <a:t>هَلْ يَجِبُ أَنْ يَعْمَلَ الطُّلَّابُ أَثْنَاءَ الدِّرَاسَةِ؟</a:t>
@@ -19674,6 +19829,7 @@
                   <a:srgbClr val="1B3B6F"/>
                 </a:solidFill>
                 <a:latin typeface="Amiri" pitchFamily="2" charset="-78"/>
+                <a:ea typeface="Amiri" pitchFamily="2" charset="-78"/>
                 <a:cs typeface="Amiri" pitchFamily="2" charset="-78"/>
               </a:rPr>
               <a:t>كَانَ وَالِدَايَ … أَمَّا جِيلُنَا فَسَيُغَيِّرُ …</a:t>
@@ -19750,6 +19906,7 @@
                   <a:srgbClr val="1B3B6F"/>
                 </a:solidFill>
                 <a:latin typeface="Amiri" pitchFamily="2" charset="-78"/>
+                <a:ea typeface="Amiri" pitchFamily="2" charset="-78"/>
                 <a:cs typeface="Amiri" pitchFamily="2" charset="-78"/>
               </a:rPr>
               <a:t>كَيْفَ تَخْتَلِفُ فُرَصُ جِيلِكَ عَنْ فُرَصِ وَالِدَيْكَ؟</a:t>
@@ -19853,6 +20010,7 @@
                   <a:srgbClr val="1B3B6F"/>
                 </a:solidFill>
                 <a:latin typeface="Amiri" pitchFamily="2" charset="-78"/>
+                <a:ea typeface="Amiri" pitchFamily="2" charset="-78"/>
                 <a:cs typeface="Amiri" pitchFamily="2" charset="-78"/>
               </a:rPr>
               <a:t>تَعَلَّمْتُ أَنَّ … عِنْدَمَا …</a:t>
@@ -19929,6 +20087,7 @@
                   <a:srgbClr val="1B3B6F"/>
                 </a:solidFill>
                 <a:latin typeface="Amiri" pitchFamily="2" charset="-78"/>
+                <a:ea typeface="Amiri" pitchFamily="2" charset="-78"/>
                 <a:cs typeface="Amiri" pitchFamily="2" charset="-78"/>
               </a:rPr>
               <a:t>مَا أَهَمُّ دَرْسٍ تَعَلَّمْتَهُ عَنِ النَّجَاحِ؟</a:t>
@@ -20032,6 +20191,7 @@
                   <a:srgbClr val="1B3B6F"/>
                 </a:solidFill>
                 <a:latin typeface="Amiri" pitchFamily="2" charset="-78"/>
+                <a:ea typeface="Amiri" pitchFamily="2" charset="-78"/>
                 <a:cs typeface="Amiri" pitchFamily="2" charset="-78"/>
               </a:rPr>
               <a:t>لَوْ نَصَحْتُهُ، لَقُلْتُ لَهُ …</a:t>
@@ -20108,6 +20268,7 @@
                   <a:srgbClr val="1B3B6F"/>
                 </a:solidFill>
                 <a:latin typeface="Amiri" pitchFamily="2" charset="-78"/>
+                <a:ea typeface="Amiri" pitchFamily="2" charset="-78"/>
                 <a:cs typeface="Amiri" pitchFamily="2" charset="-78"/>
               </a:rPr>
               <a:t>لَوْ أَعْطَيْتَ نَصِيحَةً وَاحِدَةً لِطَالِبٍ فِي الصَّفِّ السَّابِعِ، مَاذَا تَقُولُ؟</a:t>
@@ -20317,6 +20478,7 @@
                   <a:srgbClr val="D4AF37"/>
                 </a:solidFill>
                 <a:latin typeface="Amiri" pitchFamily="2" charset="-78"/>
+                <a:ea typeface="Amiri" pitchFamily="2" charset="-78"/>
                 <a:cs typeface="Amiri" pitchFamily="2" charset="-78"/>
               </a:rPr>
               <a:t>م</a:t>
@@ -20637,6 +20799,7 @@
                   <a:srgbClr val="8A6D1E"/>
                 </a:solidFill>
                 <a:latin typeface="Amiri" pitchFamily="2" charset="-78"/>
+                <a:ea typeface="Amiri" pitchFamily="2" charset="-78"/>
                 <a:cs typeface="Amiri" pitchFamily="2" charset="-78"/>
               </a:rPr>
               <a:t>آدَابُ الصَّفِّ</a:t>
@@ -22168,6 +22331,7 @@
                   <a:srgbClr val="D4AF37"/>
                 </a:solidFill>
                 <a:latin typeface="Amiri" pitchFamily="2" charset="-78"/>
+                <a:ea typeface="Amiri" pitchFamily="2" charset="-78"/>
                 <a:cs typeface="Amiri" pitchFamily="2" charset="-78"/>
               </a:rPr>
               <a:t>م</a:t>
@@ -22488,6 +22652,7 @@
                   <a:srgbClr val="8A6D1E"/>
                 </a:solidFill>
                 <a:latin typeface="Amiri" pitchFamily="2" charset="-78"/>
+                <a:ea typeface="Amiri" pitchFamily="2" charset="-78"/>
                 <a:cs typeface="Amiri" pitchFamily="2" charset="-78"/>
               </a:rPr>
               <a:t>نَمُوذَجُ الإِجَابَةِ</a:t>
@@ -22730,6 +22895,7 @@
                   <a:srgbClr val="1B3B6F"/>
                 </a:solidFill>
                 <a:latin typeface="Amiri" pitchFamily="2" charset="-78"/>
+                <a:ea typeface="Amiri" pitchFamily="2" charset="-78"/>
                 <a:cs typeface="Amiri" pitchFamily="2" charset="-78"/>
               </a:rPr>
               <a:t>مَادَّتِيَ المُفَضَّلَةُ التَّارِيخُ، لِأَنَّهُ مُمْتِعٌ.</a:t>
@@ -22806,6 +22972,7 @@
                   <a:srgbClr val="1B3B6F"/>
                 </a:solidFill>
                 <a:latin typeface="Amiri" pitchFamily="2" charset="-78"/>
+                <a:ea typeface="Amiri" pitchFamily="2" charset="-78"/>
                 <a:cs typeface="Amiri" pitchFamily="2" charset="-78"/>
               </a:rPr>
               <a:t>مَا مَادَّتُكَ المُفَضَّلَةُ؟</a:t>
@@ -22909,6 +23076,7 @@
                   <a:srgbClr val="1B3B6F"/>
                 </a:solidFill>
                 <a:latin typeface="Amiri" pitchFamily="2" charset="-78"/>
+                <a:ea typeface="Amiri" pitchFamily="2" charset="-78"/>
                 <a:cs typeface="Amiri" pitchFamily="2" charset="-78"/>
               </a:rPr>
               <a:t>أُرَاجِعُ فِي المَكْتَبَةِ، وَأَكْتُبُ مُلَخَّصَاتٍ.</a:t>
@@ -22985,6 +23153,7 @@
                   <a:srgbClr val="1B3B6F"/>
                 </a:solidFill>
                 <a:latin typeface="Amiri" pitchFamily="2" charset="-78"/>
+                <a:ea typeface="Amiri" pitchFamily="2" charset="-78"/>
                 <a:cs typeface="Amiri" pitchFamily="2" charset="-78"/>
               </a:rPr>
               <a:t>كَيْفَ تُرَاجِعُ لِلِامْتِحَانَاتِ؟</a:t>
@@ -23088,6 +23257,7 @@
                   <a:srgbClr val="1B3B6F"/>
                 </a:solidFill>
                 <a:latin typeface="Amiri" pitchFamily="2" charset="-78"/>
+                <a:ea typeface="Amiri" pitchFamily="2" charset="-78"/>
                 <a:cs typeface="Amiri" pitchFamily="2" charset="-78"/>
               </a:rPr>
               <a:t>أُمِّي مُمَرِّضَةٌ، وَتَعْمَلُ فِي مُسْتَشْفًى.</a:t>
@@ -23164,6 +23334,7 @@
                   <a:srgbClr val="1B3B6F"/>
                 </a:solidFill>
                 <a:latin typeface="Amiri" pitchFamily="2" charset="-78"/>
+                <a:ea typeface="Amiri" pitchFamily="2" charset="-78"/>
                 <a:cs typeface="Amiri" pitchFamily="2" charset="-78"/>
               </a:rPr>
               <a:t>مَاذَا يَعْمَلُ أَحَدُ أَفْرَادِ أُسْرَتِكَ؟</a:t>
@@ -23267,6 +23438,7 @@
                   <a:srgbClr val="1B3B6F"/>
                 </a:solidFill>
                 <a:latin typeface="Amiri" pitchFamily="2" charset="-78"/>
+                <a:ea typeface="Amiri" pitchFamily="2" charset="-78"/>
                 <a:cs typeface="Amiri" pitchFamily="2" charset="-78"/>
               </a:rPr>
               <a:t>لَا، لٰكِنِّي أَتَطَوَّعُ فِي نَادِي الحَيِّ.</a:t>
@@ -23343,6 +23515,7 @@
                   <a:srgbClr val="1B3B6F"/>
                 </a:solidFill>
                 <a:latin typeface="Amiri" pitchFamily="2" charset="-78"/>
+                <a:ea typeface="Amiri" pitchFamily="2" charset="-78"/>
                 <a:cs typeface="Amiri" pitchFamily="2" charset="-78"/>
               </a:rPr>
               <a:t>هَلْ عِنْدَكَ عَمَلٌ جُزْئِيٌّ؟</a:t>
@@ -23446,6 +23619,7 @@
                   <a:srgbClr val="1B3B6F"/>
                 </a:solidFill>
                 <a:latin typeface="Amiri" pitchFamily="2" charset="-78"/>
+                <a:ea typeface="Amiri" pitchFamily="2" charset="-78"/>
                 <a:cs typeface="Amiri" pitchFamily="2" charset="-78"/>
               </a:rPr>
               <a:t>سَأَدْرُسُ القَانُونَ فِي الجَامِعَةِ.</a:t>
@@ -23522,6 +23696,7 @@
                   <a:srgbClr val="1B3B6F"/>
                 </a:solidFill>
                 <a:latin typeface="Amiri" pitchFamily="2" charset="-78"/>
+                <a:ea typeface="Amiri" pitchFamily="2" charset="-78"/>
                 <a:cs typeface="Amiri" pitchFamily="2" charset="-78"/>
               </a:rPr>
               <a:t>مَاذَا سَتَفْعَلُ بَعْدَ المَدْرَسَةِ؟</a:t>
@@ -23731,6 +23906,7 @@
                   <a:srgbClr val="D4AF37"/>
                 </a:solidFill>
                 <a:latin typeface="Amiri" pitchFamily="2" charset="-78"/>
+                <a:ea typeface="Amiri" pitchFamily="2" charset="-78"/>
                 <a:cs typeface="Amiri" pitchFamily="2" charset="-78"/>
               </a:rPr>
               <a:t>م</a:t>
@@ -24051,6 +24227,7 @@
                   <a:srgbClr val="8A6D1E"/>
                 </a:solidFill>
                 <a:latin typeface="Amiri" pitchFamily="2" charset="-78"/>
+                <a:ea typeface="Amiri" pitchFamily="2" charset="-78"/>
                 <a:cs typeface="Amiri" pitchFamily="2" charset="-78"/>
               </a:rPr>
               <a:t>نَمُوذَجُ الإِجَابَةِ</a:t>
@@ -24293,6 +24470,7 @@
                   <a:srgbClr val="1B3B6F"/>
                 </a:solidFill>
                 <a:latin typeface="Amiri" pitchFamily="2" charset="-78"/>
+                <a:ea typeface="Amiri" pitchFamily="2" charset="-78"/>
                 <a:cs typeface="Amiri" pitchFamily="2" charset="-78"/>
               </a:rPr>
               <a:t>كُنْتُ أَدْرُسُ مَوَادَّ قَلِيلَةً وَسَهْلَةً، أَمَّا الآنَ فَأَدْرُسُ تِسْعَ مَوَادَّ، وَسَأَخْتَارُ ثَلَاثًا فَقَطْ فِي السَّنَةِ القَادِمَةِ.</a:t>
@@ -24369,6 +24547,7 @@
                   <a:srgbClr val="1B3B6F"/>
                 </a:solidFill>
                 <a:latin typeface="Amiri" pitchFamily="2" charset="-78"/>
+                <a:ea typeface="Amiri" pitchFamily="2" charset="-78"/>
                 <a:cs typeface="Amiri" pitchFamily="2" charset="-78"/>
               </a:rPr>
               <a:t>كَيْفَ تَغَيَّرَتْ دِرَاسَتُكَ مُنْذُ الابْتِدَائِيَّةِ؟</a:t>
@@ -24472,6 +24651,7 @@
                   <a:srgbClr val="1B3B6F"/>
                 </a:solidFill>
                 <a:latin typeface="Amiri" pitchFamily="2" charset="-78"/>
+                <a:ea typeface="Amiri" pitchFamily="2" charset="-78"/>
                 <a:cs typeface="Amiri" pitchFamily="2" charset="-78"/>
               </a:rPr>
               <a:t>أَوَّلًا، التَّوَاصُلُ وَالعَمَلُ الجَمَاعِيُّ؛ بِالإِضَافَةِ إِلَى ذٰلِكَ، المَهَارَاتُ الرَّقْمِيَّةُ وَالقُدْرَةُ عَلَى التَّعَلُّمِ.</a:t>
@@ -24548,6 +24728,7 @@
                   <a:srgbClr val="1B3B6F"/>
                 </a:solidFill>
                 <a:latin typeface="Amiri" pitchFamily="2" charset="-78"/>
+                <a:ea typeface="Amiri" pitchFamily="2" charset="-78"/>
                 <a:cs typeface="Amiri" pitchFamily="2" charset="-78"/>
               </a:rPr>
               <a:t>مَا المَهَارَاتُ الَّتِي يَطْلُبُهَا أَصْحَابُ العَمَلِ؟</a:t>
@@ -24651,6 +24832,7 @@
                   <a:srgbClr val="1B3B6F"/>
                 </a:solidFill>
                 <a:latin typeface="Amiri" pitchFamily="2" charset="-78"/>
+                <a:ea typeface="Amiri" pitchFamily="2" charset="-78"/>
                 <a:cs typeface="Amiri" pitchFamily="2" charset="-78"/>
               </a:rPr>
               <a:t>فِي الصَّيْفِ تَطَوَّعْتُ فِي مُخَيَّمٍ لِلْأَطْفَالِ، فَتَعَلَّمْتُ الصَّبْرَ وَالتَّنْظِيمَ، وَمَعَ ذٰلِكَ كَانَ العَمَلُ مُتْعِبًا.</a:t>
@@ -24727,6 +24909,7 @@
                   <a:srgbClr val="1B3B6F"/>
                 </a:solidFill>
                 <a:latin typeface="Amiri" pitchFamily="2" charset="-78"/>
+                <a:ea typeface="Amiri" pitchFamily="2" charset="-78"/>
                 <a:cs typeface="Amiri" pitchFamily="2" charset="-78"/>
               </a:rPr>
               <a:t>صِفْ تَجْرِبَةَ عَمَلٍ أَوْ تَطَوُّعٍ.</a:t>
@@ -24830,6 +25013,7 @@
                   <a:srgbClr val="1B3B6F"/>
                 </a:solidFill>
                 <a:latin typeface="Amiri" pitchFamily="2" charset="-78"/>
+                <a:ea typeface="Amiri" pitchFamily="2" charset="-78"/>
                 <a:cs typeface="Amiri" pitchFamily="2" charset="-78"/>
               </a:rPr>
               <a:t>أَرَى أَنَّ الجَامِعَةَ مُهِمَّةٌ لِبَعْضِ المِهَنِ، لٰكِنَّ الخِبْرَةَ ضَرُورِيَّةٌ لِلْجَمِيعِ؛ لِذٰلِكَ سَأَعْمَلُ وَأَنَا أَدْرُسُ.</a:t>
@@ -24906,6 +25090,7 @@
                   <a:srgbClr val="1B3B6F"/>
                 </a:solidFill>
                 <a:latin typeface="Amiri" pitchFamily="2" charset="-78"/>
+                <a:ea typeface="Amiri" pitchFamily="2" charset="-78"/>
                 <a:cs typeface="Amiri" pitchFamily="2" charset="-78"/>
               </a:rPr>
               <a:t>أَيُّهُمَا أَهَمُّ: الجَامِعَةُ أَمِ الخِبْرَةُ؟</a:t>
@@ -25009,6 +25194,7 @@
                   <a:srgbClr val="1B3B6F"/>
                 </a:solidFill>
                 <a:latin typeface="Amiri" pitchFamily="2" charset="-78"/>
+                <a:ea typeface="Amiri" pitchFamily="2" charset="-78"/>
                 <a:cs typeface="Amiri" pitchFamily="2" charset="-78"/>
               </a:rPr>
               <a:t>أَطْمَحُ إِلَى أَنْ أَكُونَ مُهَنْدِسًا فِي شَرِكَةٍ لِلطَّاقَةِ، وَإِذَا نَجَحْتُ فِي ذٰلِكَ، فَسَأُؤَسِّسُ شَرِكَتِي الخَاصَّةَ.</a:t>
@@ -25085,6 +25271,7 @@
                   <a:srgbClr val="1B3B6F"/>
                 </a:solidFill>
                 <a:latin typeface="Amiri" pitchFamily="2" charset="-78"/>
+                <a:ea typeface="Amiri" pitchFamily="2" charset="-78"/>
                 <a:cs typeface="Amiri" pitchFamily="2" charset="-78"/>
               </a:rPr>
               <a:t>أَيْنَ تَرَى نَفْسَكَ بَعْدَ عَشْرِ سَنَوَاتٍ؟</a:t>
@@ -25294,6 +25481,7 @@
                   <a:srgbClr val="D4AF37"/>
                 </a:solidFill>
                 <a:latin typeface="Amiri" pitchFamily="2" charset="-78"/>
+                <a:ea typeface="Amiri" pitchFamily="2" charset="-78"/>
                 <a:cs typeface="Amiri" pitchFamily="2" charset="-78"/>
               </a:rPr>
               <a:t>م</a:t>
@@ -25614,6 +25802,7 @@
                   <a:srgbClr val="8A6D1E"/>
                 </a:solidFill>
                 <a:latin typeface="Amiri" pitchFamily="2" charset="-78"/>
+                <a:ea typeface="Amiri" pitchFamily="2" charset="-78"/>
                 <a:cs typeface="Amiri" pitchFamily="2" charset="-78"/>
               </a:rPr>
               <a:t>نَمُوذَجُ الإِجَابَةِ</a:t>
@@ -25856,6 +26045,7 @@
                   <a:srgbClr val="1B3B6F"/>
                 </a:solidFill>
                 <a:latin typeface="Amiri" pitchFamily="2" charset="-78"/>
+                <a:ea typeface="Amiri" pitchFamily="2" charset="-78"/>
                 <a:cs typeface="Amiri" pitchFamily="2" charset="-78"/>
               </a:rPr>
               <a:t>صَحِيحٌ أَنَّهَا تُعَلِّمُ المَعْرِفَةَ، غَيْرَ أَنَّهَا لَا تُعَلِّمُ كِتَابَةَ السِّيرَةِ الذَّاتِيَّةِ أَوِ التَّصَرُّفَ فِي المُقَابَلَاتِ، مِمَّا يَجْعَلُ البِدَايَةَ صَعْبَةً.</a:t>
@@ -25932,6 +26122,7 @@
                   <a:srgbClr val="1B3B6F"/>
                 </a:solidFill>
                 <a:latin typeface="Amiri" pitchFamily="2" charset="-78"/>
+                <a:ea typeface="Amiri" pitchFamily="2" charset="-78"/>
                 <a:cs typeface="Amiri" pitchFamily="2" charset="-78"/>
               </a:rPr>
               <a:t>هَلْ تُعِدُّ المَدَارِسُ الطُّلَّابَ لِعَالَمِ العَمَلِ؟</a:t>
@@ -26035,6 +26226,7 @@
                   <a:srgbClr val="1B3B6F"/>
                 </a:solidFill>
                 <a:latin typeface="Amiri" pitchFamily="2" charset="-78"/>
+                <a:ea typeface="Amiri" pitchFamily="2" charset="-78"/>
                 <a:cs typeface="Amiri" pitchFamily="2" charset="-78"/>
               </a:rPr>
               <a:t>مِنْ نَاحِيَةٍ، يَكْتَسِبُونَ خِبْرَةً وَمَالًا، وَمِنْ نَاحِيَةٍ أُخْرَى، قَدْ تَتَأَثَّرُ دَرَجَاتُهُمْ إِذَا كَانَتِ السَّاعَاتُ طَوِيلَةً.</a:t>
@@ -26111,6 +26303,7 @@
                   <a:srgbClr val="1B3B6F"/>
                 </a:solidFill>
                 <a:latin typeface="Amiri" pitchFamily="2" charset="-78"/>
+                <a:ea typeface="Amiri" pitchFamily="2" charset="-78"/>
                 <a:cs typeface="Amiri" pitchFamily="2" charset="-78"/>
               </a:rPr>
               <a:t>هَلْ يَجِبُ أَنْ يَعْمَلَ الطُّلَّابُ أَثْنَاءَ الدِّرَاسَةِ؟</a:t>
@@ -26214,6 +26407,7 @@
                   <a:srgbClr val="1B3B6F"/>
                 </a:solidFill>
                 <a:latin typeface="Amiri" pitchFamily="2" charset="-78"/>
+                <a:ea typeface="Amiri" pitchFamily="2" charset="-78"/>
                 <a:cs typeface="Amiri" pitchFamily="2" charset="-78"/>
               </a:rPr>
               <a:t>كَانَ وَالِدَايَ يَعْمَلَانِ فِي وَظِيفَةٍ وَاحِدَةٍ طُولَ حَيَاتِهِمَا، أَمَّا جِيلُنَا فَسَيُغَيِّرُ مِهْنَتَهُ مَرَّاتٍ، مِمَّا يَتَطَلَّبُ تَعَلُّمًا مُسْتَمِرًّا.</a:t>
@@ -26290,6 +26484,7 @@
                   <a:srgbClr val="1B3B6F"/>
                 </a:solidFill>
                 <a:latin typeface="Amiri" pitchFamily="2" charset="-78"/>
+                <a:ea typeface="Amiri" pitchFamily="2" charset="-78"/>
                 <a:cs typeface="Amiri" pitchFamily="2" charset="-78"/>
               </a:rPr>
               <a:t>كَيْفَ تَخْتَلِفُ فُرَصُ جِيلِكَ عَنْ فُرَصِ وَالِدَيْكَ؟</a:t>
@@ -26499,6 +26694,7 @@
                   <a:srgbClr val="D4AF37"/>
                 </a:solidFill>
                 <a:latin typeface="Amiri" pitchFamily="2" charset="-78"/>
+                <a:ea typeface="Amiri" pitchFamily="2" charset="-78"/>
                 <a:cs typeface="Amiri" pitchFamily="2" charset="-78"/>
               </a:rPr>
               <a:t>م</a:t>
@@ -26819,6 +27015,7 @@
                   <a:srgbClr val="8A6D1E"/>
                 </a:solidFill>
                 <a:latin typeface="Amiri" pitchFamily="2" charset="-78"/>
+                <a:ea typeface="Amiri" pitchFamily="2" charset="-78"/>
                 <a:cs typeface="Amiri" pitchFamily="2" charset="-78"/>
               </a:rPr>
               <a:t>نَمُوذَجُ الإِجَابَةِ</a:t>
@@ -27061,6 +27258,7 @@
                   <a:srgbClr val="1B3B6F"/>
                 </a:solidFill>
                 <a:latin typeface="Amiri" pitchFamily="2" charset="-78"/>
+                <a:ea typeface="Amiri" pitchFamily="2" charset="-78"/>
                 <a:cs typeface="Amiri" pitchFamily="2" charset="-78"/>
               </a:rPr>
               <a:t>تَعَلَّمْتُ أَنَّ الفَشَلَ جُزْءٌ مِنَ النَّجَاحِ، عِنْدَمَا رَسَبْتُ فِي امْتِحَانٍ تَجْرِيبِيٍّ، ثُمَّ نَجَحْتُ بَعْدَهُ بِتَفَوُّقٍ.</a:t>
@@ -27137,6 +27335,7 @@
                   <a:srgbClr val="1B3B6F"/>
                 </a:solidFill>
                 <a:latin typeface="Amiri" pitchFamily="2" charset="-78"/>
+                <a:ea typeface="Amiri" pitchFamily="2" charset="-78"/>
                 <a:cs typeface="Amiri" pitchFamily="2" charset="-78"/>
               </a:rPr>
               <a:t>مَا أَهَمُّ دَرْسٍ تَعَلَّمْتَهُ عَنِ النَّجَاحِ؟</a:t>
@@ -27240,6 +27439,7 @@
                   <a:srgbClr val="1B3B6F"/>
                 </a:solidFill>
                 <a:latin typeface="Amiri" pitchFamily="2" charset="-78"/>
+                <a:ea typeface="Amiri" pitchFamily="2" charset="-78"/>
                 <a:cs typeface="Amiri" pitchFamily="2" charset="-78"/>
               </a:rPr>
               <a:t>لَوْ نَصَحْتُهُ، لَقُلْتُ لَهُ: "جَرِّبْ كُلَّ شَيْءٍ، وَتَطَوَّعْ، وَاقْرَأْ؛ فَالمَهَارَاتُ الَّتِي تَبْنِيهَا اليَوْمَ سَتَفْتَحُ لَكَ أَبْوَابًا لَا تَتَخَيَّلُهَا".</a:t>
@@ -27319,6 +27519,7 @@
                   <a:srgbClr val="1B3B6F"/>
                 </a:solidFill>
                 <a:latin typeface="Amiri" pitchFamily="2" charset="-78"/>
+                <a:ea typeface="Amiri" pitchFamily="2" charset="-78"/>
                 <a:cs typeface="Amiri" pitchFamily="2" charset="-78"/>
               </a:rPr>
               <a:t>لَوْ أَعْطَيْتَ نَصِيحَةً وَاحِدَةً لِطَالِبٍ فِي الصَّفِّ السَّابِعِ، مَاذَا تَقُولُ؟</a:t>
@@ -27528,6 +27729,7 @@
                   <a:srgbClr val="D4AF37"/>
                 </a:solidFill>
                 <a:latin typeface="Amiri" pitchFamily="2" charset="-78"/>
+                <a:ea typeface="Amiri" pitchFamily="2" charset="-78"/>
                 <a:cs typeface="Amiri" pitchFamily="2" charset="-78"/>
               </a:rPr>
               <a:t>م</a:t>
@@ -27848,6 +28050,7 @@
                   <a:srgbClr val="8A6D1E"/>
                 </a:solidFill>
                 <a:latin typeface="Amiri" pitchFamily="2" charset="-78"/>
+                <a:ea typeface="Amiri" pitchFamily="2" charset="-78"/>
                 <a:cs typeface="Amiri" pitchFamily="2" charset="-78"/>
               </a:rPr>
               <a:t>قَيِّمْ عَمَلَكَ</a:t>
@@ -29092,6 +29295,7 @@
                   <a:srgbClr val="FFFFFF"/>
                 </a:solidFill>
                 <a:latin typeface="Amiri" pitchFamily="2" charset="-78"/>
+                <a:ea typeface="Amiri" pitchFamily="2" charset="-78"/>
                 <a:cs typeface="Amiri" pitchFamily="2" charset="-78"/>
               </a:rPr>
               <a:t>أَحْسَنْتُمْ! إِلَى اللِّقَاءِ</a:t>
@@ -29244,6 +29448,7 @@
                   <a:srgbClr val="D4AF37"/>
                 </a:solidFill>
                 <a:latin typeface="Amiri" pitchFamily="2" charset="-78"/>
+                <a:ea typeface="Amiri" pitchFamily="2" charset="-78"/>
                 <a:cs typeface="Amiri" pitchFamily="2" charset="-78"/>
               </a:rPr>
               <a:t>وَرْشَةُ الكِتَابَةِ</a:t>
@@ -29377,6 +29582,7 @@
                   <a:srgbClr val="D4AF37"/>
                 </a:solidFill>
                 <a:latin typeface="Amiri" pitchFamily="2" charset="-78"/>
+                <a:ea typeface="Amiri" pitchFamily="2" charset="-78"/>
                 <a:cs typeface="Amiri" pitchFamily="2" charset="-78"/>
               </a:rPr>
               <a:t>م</a:t>
@@ -29697,6 +29903,7 @@
                   <a:srgbClr val="8A6D1E"/>
                 </a:solidFill>
                 <a:latin typeface="Amiri" pitchFamily="2" charset="-78"/>
+                <a:ea typeface="Amiri" pitchFamily="2" charset="-78"/>
                 <a:cs typeface="Amiri" pitchFamily="2" charset="-78"/>
               </a:rPr>
               <a:t>خَرِيطَةُ الوَرْشَةِ</a:t>
@@ -30011,6 +30218,7 @@
                   <a:srgbClr val="1B3B6F"/>
                 </a:solidFill>
                 <a:latin typeface="Amiri" pitchFamily="2" charset="-78"/>
+                <a:ea typeface="Amiri" pitchFamily="2" charset="-78"/>
                 <a:cs typeface="Amiri" pitchFamily="2" charset="-78"/>
               </a:rPr>
               <a:t>كَيْفَ</a:t>
@@ -30287,6 +30495,7 @@
                   <a:srgbClr val="1E6B52"/>
                 </a:solidFill>
                 <a:latin typeface="Amiri" pitchFamily="2" charset="-78"/>
+                <a:ea typeface="Amiri" pitchFamily="2" charset="-78"/>
                 <a:cs typeface="Amiri" pitchFamily="2" charset="-78"/>
               </a:rPr>
               <a:t>تَمْثِيلُ الدَّوْرِ</a:t>
@@ -30563,6 +30772,7 @@
                   <a:srgbClr val="8A6D1E"/>
                 </a:solidFill>
                 <a:latin typeface="Amiri" pitchFamily="2" charset="-78"/>
+                <a:ea typeface="Amiri" pitchFamily="2" charset="-78"/>
                 <a:cs typeface="Amiri" pitchFamily="2" charset="-78"/>
               </a:rPr>
               <a:t>النَّمُوذَجُ</a:t>
@@ -30839,6 +31049,7 @@
                   <a:srgbClr val="1E6B52"/>
                 </a:solidFill>
                 <a:latin typeface="Amiri" pitchFamily="2" charset="-78"/>
+                <a:ea typeface="Amiri" pitchFamily="2" charset="-78"/>
                 <a:cs typeface="Amiri" pitchFamily="2" charset="-78"/>
               </a:rPr>
               <a:t>المُحَادَثَةُ</a:t>
@@ -31115,6 +31326,7 @@
                   <a:srgbClr val="8A6D1E"/>
                 </a:solidFill>
                 <a:latin typeface="Amiri" pitchFamily="2" charset="-78"/>
+                <a:ea typeface="Amiri" pitchFamily="2" charset="-78"/>
                 <a:cs typeface="Amiri" pitchFamily="2" charset="-78"/>
               </a:rPr>
               <a:t>قَيِّمْ</a:t>
@@ -31358,6 +31570,7 @@
                   <a:srgbClr val="D4AF37"/>
                 </a:solidFill>
                 <a:latin typeface="Amiri" pitchFamily="2" charset="-78"/>
+                <a:ea typeface="Amiri" pitchFamily="2" charset="-78"/>
                 <a:cs typeface="Amiri" pitchFamily="2" charset="-78"/>
               </a:rPr>
               <a:t>م</a:t>
@@ -31678,6 +31891,7 @@
                   <a:srgbClr val="8A6D1E"/>
                 </a:solidFill>
                 <a:latin typeface="Amiri" pitchFamily="2" charset="-78"/>
+                <a:ea typeface="Amiri" pitchFamily="2" charset="-78"/>
                 <a:cs typeface="Amiri" pitchFamily="2" charset="-78"/>
               </a:rPr>
               <a:t>امْتِحَانُ التَّحَدُّثِ</a:t>
@@ -32302,6 +32516,7 @@
                   <a:srgbClr val="1B3B6F"/>
                 </a:solidFill>
                 <a:latin typeface="Amiri" pitchFamily="2" charset="-78"/>
+                <a:ea typeface="Amiri" pitchFamily="2" charset="-78"/>
                 <a:cs typeface="Amiri" pitchFamily="2" charset="-78"/>
               </a:rPr>
               <a:t>عَفْوًا، هَلْ يُمْكِنُ أَنْ تُعِيدَ السُّؤَالَ؟</a:t>
@@ -32401,6 +32616,7 @@
                   <a:srgbClr val="1B3B6F"/>
                 </a:solidFill>
                 <a:latin typeface="Amiri" pitchFamily="2" charset="-78"/>
+                <a:ea typeface="Amiri" pitchFamily="2" charset="-78"/>
                 <a:cs typeface="Amiri" pitchFamily="2" charset="-78"/>
               </a:rPr>
               <a:t>لَحْظَةً، دَعْنِي أُفَكِّرُ …</a:t>
@@ -32500,6 +32716,7 @@
                   <a:srgbClr val="1B3B6F"/>
                 </a:solidFill>
                 <a:latin typeface="Amiri" pitchFamily="2" charset="-78"/>
+                <a:ea typeface="Amiri" pitchFamily="2" charset="-78"/>
                 <a:cs typeface="Amiri" pitchFamily="2" charset="-78"/>
               </a:rPr>
               <a:t>أَقْصِدُ …</a:t>
@@ -32671,6 +32888,7 @@
                   <a:srgbClr val="D4AF37"/>
                 </a:solidFill>
                 <a:latin typeface="Amiri" pitchFamily="2" charset="-78"/>
+                <a:ea typeface="Amiri" pitchFamily="2" charset="-78"/>
                 <a:cs typeface="Amiri" pitchFamily="2" charset="-78"/>
               </a:rPr>
               <a:t>م</a:t>
@@ -32991,6 +33209,7 @@
                   <a:srgbClr val="8A6D1E"/>
                 </a:solidFill>
                 <a:latin typeface="Amiri" pitchFamily="2" charset="-78"/>
+                <a:ea typeface="Amiri" pitchFamily="2" charset="-78"/>
                 <a:cs typeface="Amiri" pitchFamily="2" charset="-78"/>
               </a:rPr>
               <a:t>أَدَوَاتُ الرَّبْطِ وَالأَزْمِنَةُ</a:t>
@@ -33294,6 +33513,7 @@
                   <a:srgbClr val="1B3B6F"/>
                 </a:solidFill>
                 <a:latin typeface="Amiri" pitchFamily="2" charset="-78"/>
+                <a:ea typeface="Amiri" pitchFamily="2" charset="-78"/>
                 <a:cs typeface="Amiri" pitchFamily="2" charset="-78"/>
               </a:rPr>
               <a:t>أَوَّلًا · ثُمَّ · أَخِيرًا</a:t>
@@ -33451,6 +33671,7 @@
                   <a:srgbClr val="1B3B6F"/>
                 </a:solidFill>
                 <a:latin typeface="Amiri" pitchFamily="2" charset="-78"/>
+                <a:ea typeface="Amiri" pitchFamily="2" charset="-78"/>
                 <a:cs typeface="Amiri" pitchFamily="2" charset="-78"/>
               </a:rPr>
               <a:t>قَبْلَ ذٰلِكَ</a:t>
@@ -33554,6 +33775,7 @@
                   <a:srgbClr val="1B3B6F"/>
                 </a:solidFill>
                 <a:latin typeface="Amiri" pitchFamily="2" charset="-78"/>
+                <a:ea typeface="Amiri" pitchFamily="2" charset="-78"/>
                 <a:cs typeface="Amiri" pitchFamily="2" charset="-78"/>
               </a:rPr>
               <a:t>بَعْدَ ذٰلِكَ</a:t>
@@ -33819,6 +34041,7 @@
                   <a:srgbClr val="1B3B6F"/>
                 </a:solidFill>
                 <a:latin typeface="Amiri" pitchFamily="2" charset="-78"/>
+                <a:ea typeface="Amiri" pitchFamily="2" charset="-78"/>
                 <a:cs typeface="Amiri" pitchFamily="2" charset="-78"/>
               </a:rPr>
               <a:t>بِالإِضَافَةِ إِلَى ذٰلِكَ</a:t>
@@ -33976,6 +34199,7 @@
                   <a:srgbClr val="1B3B6F"/>
                 </a:solidFill>
                 <a:latin typeface="Amiri" pitchFamily="2" charset="-78"/>
+                <a:ea typeface="Amiri" pitchFamily="2" charset="-78"/>
                 <a:cs typeface="Amiri" pitchFamily="2" charset="-78"/>
               </a:rPr>
               <a:t>فَضْلًا عَنْ ذٰلِكَ</a:t>
@@ -34079,6 +34303,7 @@
                   <a:srgbClr val="1B3B6F"/>
                 </a:solidFill>
                 <a:latin typeface="Amiri" pitchFamily="2" charset="-78"/>
+                <a:ea typeface="Amiri" pitchFamily="2" charset="-78"/>
                 <a:cs typeface="Amiri" pitchFamily="2" charset="-78"/>
               </a:rPr>
               <a:t>كَمَا أَنَّ</a:t>
@@ -34344,6 +34569,7 @@
                   <a:srgbClr val="1B3B6F"/>
                 </a:solidFill>
                 <a:latin typeface="Amiri" pitchFamily="2" charset="-78"/>
+                <a:ea typeface="Amiri" pitchFamily="2" charset="-78"/>
                 <a:cs typeface="Amiri" pitchFamily="2" charset="-78"/>
               </a:rPr>
               <a:t>مَعَ ذٰلِكَ · غَيْرَ أَنَّ</a:t>
@@ -34501,6 +34727,7 @@
                   <a:srgbClr val="1B3B6F"/>
                 </a:solidFill>
                 <a:latin typeface="Amiri" pitchFamily="2" charset="-78"/>
+                <a:ea typeface="Amiri" pitchFamily="2" charset="-78"/>
                 <a:cs typeface="Amiri" pitchFamily="2" charset="-78"/>
               </a:rPr>
               <a:t>بَيْنَمَا</a:t>
@@ -34604,6 +34831,7 @@
                   <a:srgbClr val="1B3B6F"/>
                 </a:solidFill>
                 <a:latin typeface="Amiri" pitchFamily="2" charset="-78"/>
+                <a:ea typeface="Amiri" pitchFamily="2" charset="-78"/>
                 <a:cs typeface="Amiri" pitchFamily="2" charset="-78"/>
               </a:rPr>
               <a:t>مَعَ أَنَّ</a:t>
@@ -34869,6 +35097,7 @@
                   <a:srgbClr val="1B3B6F"/>
                 </a:solidFill>
                 <a:latin typeface="Amiri" pitchFamily="2" charset="-78"/>
+                <a:ea typeface="Amiri" pitchFamily="2" charset="-78"/>
                 <a:cs typeface="Amiri" pitchFamily="2" charset="-78"/>
               </a:rPr>
               <a:t>لِذٰلِكَ · مِمَّا</a:t>
@@ -35026,6 +35255,7 @@
                   <a:srgbClr val="1B3B6F"/>
                 </a:solidFill>
                 <a:latin typeface="Amiri" pitchFamily="2" charset="-78"/>
+                <a:ea typeface="Amiri" pitchFamily="2" charset="-78"/>
                 <a:cs typeface="Amiri" pitchFamily="2" charset="-78"/>
               </a:rPr>
               <a:t>لِكَيْ</a:t>
@@ -35129,6 +35359,7 @@
                   <a:srgbClr val="1B3B6F"/>
                 </a:solidFill>
                 <a:latin typeface="Amiri" pitchFamily="2" charset="-78"/>
+                <a:ea typeface="Amiri" pitchFamily="2" charset="-78"/>
                 <a:cs typeface="Amiri" pitchFamily="2" charset="-78"/>
               </a:rPr>
               <a:t>بِسَبَبِ</a:t>
@@ -35394,6 +35625,7 @@
                   <a:srgbClr val="1B3B6F"/>
                 </a:solidFill>
                 <a:latin typeface="Amiri" pitchFamily="2" charset="-78"/>
+                <a:ea typeface="Amiri" pitchFamily="2" charset="-78"/>
                 <a:cs typeface="Amiri" pitchFamily="2" charset="-78"/>
               </a:rPr>
               <a:t>كُنْتُ أَدْرُسُ</a:t>
@@ -35551,6 +35783,7 @@
                   <a:srgbClr val="1B3B6F"/>
                 </a:solidFill>
                 <a:latin typeface="Amiri" pitchFamily="2" charset="-78"/>
+                <a:ea typeface="Amiri" pitchFamily="2" charset="-78"/>
                 <a:cs typeface="Amiri" pitchFamily="2" charset="-78"/>
               </a:rPr>
               <a:t>سَأَدْرُسُ</a:t>
@@ -35654,6 +35887,7 @@
                   <a:srgbClr val="1B3B6F"/>
                 </a:solidFill>
                 <a:latin typeface="Amiri" pitchFamily="2" charset="-78"/>
+                <a:ea typeface="Amiri" pitchFamily="2" charset="-78"/>
                 <a:cs typeface="Amiri" pitchFamily="2" charset="-78"/>
               </a:rPr>
               <a:t>الآنَ أَدْرُسُ</a:t>
@@ -35919,6 +36153,7 @@
                   <a:srgbClr val="1B3B6F"/>
                 </a:solidFill>
                 <a:latin typeface="Amiri" pitchFamily="2" charset="-78"/>
+                <a:ea typeface="Amiri" pitchFamily="2" charset="-78"/>
                 <a:cs typeface="Amiri" pitchFamily="2" charset="-78"/>
               </a:rPr>
               <a:t>حَضْرَتُكَ · حَضْرَتُكِ</a:t>
@@ -36076,6 +36311,7 @@
                   <a:srgbClr val="1B3B6F"/>
                 </a:solidFill>
                 <a:latin typeface="Amiri" pitchFamily="2" charset="-78"/>
+                <a:ea typeface="Amiri" pitchFamily="2" charset="-78"/>
                 <a:cs typeface="Amiri" pitchFamily="2" charset="-78"/>
               </a:rPr>
               <a:t>حَضْرَةَ … المُحْتَرَمِ</a:t>
@@ -36179,6 +36415,7 @@
                   <a:srgbClr val="1B3B6F"/>
                 </a:solidFill>
                 <a:latin typeface="Amiri" pitchFamily="2" charset="-78"/>
+                <a:ea typeface="Amiri" pitchFamily="2" charset="-78"/>
                 <a:cs typeface="Amiri" pitchFamily="2" charset="-78"/>
               </a:rPr>
               <a:t>أَنْتَ · أَنْتِ</a:t>
@@ -36312,6 +36549,7 @@
                   <a:srgbClr val="D4AF37"/>
                 </a:solidFill>
                 <a:latin typeface="Amiri" pitchFamily="2" charset="-78"/>
+                <a:ea typeface="Amiri" pitchFamily="2" charset="-78"/>
                 <a:cs typeface="Amiri" pitchFamily="2" charset="-78"/>
               </a:rPr>
               <a:t>م</a:t>
@@ -36632,6 +36870,7 @@
                   <a:srgbClr val="8A6D1E"/>
                 </a:solidFill>
                 <a:latin typeface="Amiri" pitchFamily="2" charset="-78"/>
+                <a:ea typeface="Amiri" pitchFamily="2" charset="-78"/>
                 <a:cs typeface="Amiri" pitchFamily="2" charset="-78"/>
               </a:rPr>
               <a:t>رِحْلَةُ المِحْوَرِ د</a:t>
@@ -36935,6 +37174,7 @@
                   <a:srgbClr val="1B3B6F"/>
                 </a:solidFill>
                 <a:latin typeface="Amiri" pitchFamily="2" charset="-78"/>
+                <a:ea typeface="Amiri" pitchFamily="2" charset="-78"/>
                 <a:cs typeface="Amiri" pitchFamily="2" charset="-78"/>
               </a:rPr>
               <a:t>المَرْحَلَةُ الثَّانَوِيَّةُ</a:t>
@@ -37092,6 +37332,7 @@
                   <a:srgbClr val="1B3B6F"/>
                 </a:solidFill>
                 <a:latin typeface="Amiri" pitchFamily="2" charset="-78"/>
+                <a:ea typeface="Amiri" pitchFamily="2" charset="-78"/>
                 <a:cs typeface="Amiri" pitchFamily="2" charset="-78"/>
               </a:rPr>
               <a:t>المُرَاجَعَةُ</a:t>
@@ -37195,6 +37436,7 @@
                   <a:srgbClr val="1B3B6F"/>
                 </a:solidFill>
                 <a:latin typeface="Amiri" pitchFamily="2" charset="-78"/>
+                <a:ea typeface="Amiri" pitchFamily="2" charset="-78"/>
                 <a:cs typeface="Amiri" pitchFamily="2" charset="-78"/>
               </a:rPr>
               <a:t>المَوَادُّ</a:t>
@@ -37460,6 +37702,7 @@
                   <a:srgbClr val="1B3B6F"/>
                 </a:solidFill>
                 <a:latin typeface="Amiri" pitchFamily="2" charset="-78"/>
+                <a:ea typeface="Amiri" pitchFamily="2" charset="-78"/>
                 <a:cs typeface="Amiri" pitchFamily="2" charset="-78"/>
               </a:rPr>
               <a:t>شَهَادَةٌ · دَوْرَةٌ · تَدْرِيبٌ</a:t>
@@ -37617,6 +37860,7 @@
                   <a:srgbClr val="1B3B6F"/>
                 </a:solidFill>
                 <a:latin typeface="Amiri" pitchFamily="2" charset="-78"/>
+                <a:ea typeface="Amiri" pitchFamily="2" charset="-78"/>
                 <a:cs typeface="Amiri" pitchFamily="2" charset="-78"/>
               </a:rPr>
               <a:t>خِبْرَةٌ</a:t>
@@ -37720,6 +37964,7 @@
                   <a:srgbClr val="1B3B6F"/>
                 </a:solidFill>
                 <a:latin typeface="Amiri" pitchFamily="2" charset="-78"/>
+                <a:ea typeface="Amiri" pitchFamily="2" charset="-78"/>
                 <a:cs typeface="Amiri" pitchFamily="2" charset="-78"/>
               </a:rPr>
               <a:t>مَهَارَاتٌ</a:t>
@@ -37985,6 +38230,7 @@
                   <a:srgbClr val="1B3B6F"/>
                 </a:solidFill>
                 <a:latin typeface="Amiri" pitchFamily="2" charset="-78"/>
+                <a:ea typeface="Amiri" pitchFamily="2" charset="-78"/>
                 <a:cs typeface="Amiri" pitchFamily="2" charset="-78"/>
               </a:rPr>
               <a:t>وَظِيفَةٌ · مِهْنَةٌ</a:t>
@@ -38142,6 +38388,7 @@
                   <a:srgbClr val="1B3B6F"/>
                 </a:solidFill>
                 <a:latin typeface="Amiri" pitchFamily="2" charset="-78"/>
+                <a:ea typeface="Amiri" pitchFamily="2" charset="-78"/>
                 <a:cs typeface="Amiri" pitchFamily="2" charset="-78"/>
               </a:rPr>
               <a:t>رَاتِبٌ</a:t>
@@ -38245,6 +38492,7 @@
                   <a:srgbClr val="1B3B6F"/>
                 </a:solidFill>
                 <a:latin typeface="Amiri" pitchFamily="2" charset="-78"/>
+                <a:ea typeface="Amiri" pitchFamily="2" charset="-78"/>
                 <a:cs typeface="Amiri" pitchFamily="2" charset="-78"/>
               </a:rPr>
               <a:t>مَكَانُ العَمَلِ</a:t>
@@ -38510,6 +38758,7 @@
                   <a:srgbClr val="1B3B6F"/>
                 </a:solidFill>
                 <a:latin typeface="Amiri" pitchFamily="2" charset="-78"/>
+                <a:ea typeface="Amiri" pitchFamily="2" charset="-78"/>
                 <a:cs typeface="Amiri" pitchFamily="2" charset="-78"/>
               </a:rPr>
               <a:t>مُقَابَلَةٌ · سِيرَةٌ ذَاتِيَّةٌ</a:t>
@@ -38667,6 +38916,7 @@
                   <a:srgbClr val="1B3B6F"/>
                 </a:solidFill>
                 <a:latin typeface="Amiri" pitchFamily="2" charset="-78"/>
+                <a:ea typeface="Amiri" pitchFamily="2" charset="-78"/>
                 <a:cs typeface="Amiri" pitchFamily="2" charset="-78"/>
               </a:rPr>
               <a:t>قُبِلْتُ</a:t>
@@ -38770,6 +39020,7 @@
                   <a:srgbClr val="1B3B6F"/>
                 </a:solidFill>
                 <a:latin typeface="Amiri" pitchFamily="2" charset="-78"/>
+                <a:ea typeface="Amiri" pitchFamily="2" charset="-78"/>
                 <a:cs typeface="Amiri" pitchFamily="2" charset="-78"/>
               </a:rPr>
               <a:t>أَتَقَدَّمُ لِوَظِيفَةٍ</a:t>
@@ -39035,6 +39286,7 @@
                   <a:srgbClr val="1B3B6F"/>
                 </a:solidFill>
                 <a:latin typeface="Amiri" pitchFamily="2" charset="-78"/>
+                <a:ea typeface="Amiri" pitchFamily="2" charset="-78"/>
                 <a:cs typeface="Amiri" pitchFamily="2" charset="-78"/>
               </a:rPr>
               <a:t>أَطْمَحُ إِلَى أَنْ …</a:t>
@@ -39192,6 +39444,7 @@
                   <a:srgbClr val="1B3B6F"/>
                 </a:solidFill>
                 <a:latin typeface="Amiri" pitchFamily="2" charset="-78"/>
+                <a:ea typeface="Amiri" pitchFamily="2" charset="-78"/>
                 <a:cs typeface="Amiri" pitchFamily="2" charset="-78"/>
               </a:rPr>
               <a:t>خُطَّةٌ بَدِيلَةٌ</a:t>
@@ -39295,6 +39548,7 @@
                   <a:srgbClr val="1B3B6F"/>
                 </a:solidFill>
                 <a:latin typeface="Amiri" pitchFamily="2" charset="-78"/>
+                <a:ea typeface="Amiri" pitchFamily="2" charset="-78"/>
                 <a:cs typeface="Amiri" pitchFamily="2" charset="-78"/>
               </a:rPr>
               <a:t>أَتَمَنَّى أَنْ</a:t>
@@ -39560,6 +39814,7 @@
                   <a:srgbClr val="1B3B6F"/>
                 </a:solidFill>
                 <a:latin typeface="Amiri" pitchFamily="2" charset="-78"/>
+                <a:ea typeface="Amiri" pitchFamily="2" charset="-78"/>
                 <a:cs typeface="Amiri" pitchFamily="2" charset="-78"/>
               </a:rPr>
               <a:t>إِذَا لَمْ … فَسَوْفَ …</a:t>
@@ -39717,6 +39972,7 @@
                   <a:srgbClr val="1B3B6F"/>
                 </a:solidFill>
                 <a:latin typeface="Amiri" pitchFamily="2" charset="-78"/>
+                <a:ea typeface="Amiri" pitchFamily="2" charset="-78"/>
                 <a:cs typeface="Amiri" pitchFamily="2" charset="-78"/>
               </a:rPr>
               <a:t>لَنْ أَتْرُكَ</a:t>
@@ -39820,6 +40076,7 @@
                   <a:srgbClr val="1B3B6F"/>
                 </a:solidFill>
                 <a:latin typeface="Amiri" pitchFamily="2" charset="-78"/>
+                <a:ea typeface="Amiri" pitchFamily="2" charset="-78"/>
                 <a:cs typeface="Amiri" pitchFamily="2" charset="-78"/>
               </a:rPr>
               <a:t>لَوْ كُنْتُ … لَاخْتَرْتُ</a:t>
@@ -39953,6 +40210,7 @@
                   <a:srgbClr val="D4AF37"/>
                 </a:solidFill>
                 <a:latin typeface="Amiri" pitchFamily="2" charset="-78"/>
+                <a:ea typeface="Amiri" pitchFamily="2" charset="-78"/>
                 <a:cs typeface="Amiri" pitchFamily="2" charset="-78"/>
               </a:rPr>
               <a:t>م</a:t>
@@ -40273,6 +40531,7 @@
                   <a:srgbClr val="8A6D1E"/>
                 </a:solidFill>
                 <a:latin typeface="Amiri" pitchFamily="2" charset="-78"/>
+                <a:ea typeface="Amiri" pitchFamily="2" charset="-78"/>
                 <a:cs typeface="Amiri" pitchFamily="2" charset="-78"/>
               </a:rPr>
               <a:t>فِي الغُرَفِ</a:t>
@@ -41449,6 +41708,7 @@
                   <a:srgbClr val="1B3B6F"/>
                 </a:solidFill>
                 <a:latin typeface="Amiri" pitchFamily="2" charset="-78"/>
+                <a:ea typeface="Amiri" pitchFamily="2" charset="-78"/>
                 <a:cs typeface="Amiri" pitchFamily="2" charset="-78"/>
               </a:rPr>
               <a:t>دَوْرُكَ!</a:t>
@@ -41525,6 +41785,7 @@
                   <a:srgbClr val="1B3B6F"/>
                 </a:solidFill>
                 <a:latin typeface="Amiri" pitchFamily="2" charset="-78"/>
+                <a:ea typeface="Amiri" pitchFamily="2" charset="-78"/>
                 <a:cs typeface="Amiri" pitchFamily="2" charset="-78"/>
               </a:rPr>
               <a:t>أَحْسَنْتَ! / أَحْسَنْتِ!</a:t>
@@ -41601,6 +41862,7 @@
                   <a:srgbClr val="1B3B6F"/>
                 </a:solidFill>
                 <a:latin typeface="Amiri" pitchFamily="2" charset="-78"/>
+                <a:ea typeface="Amiri" pitchFamily="2" charset="-78"/>
                 <a:cs typeface="Amiri" pitchFamily="2" charset="-78"/>
               </a:rPr>
               <a:t>تَكَلَّمْ أَكْثَرَ، مِنْ فَضْلِكَ</a:t>
@@ -41677,6 +41939,7 @@
                   <a:srgbClr val="1B3B6F"/>
                 </a:solidFill>
                 <a:latin typeface="Amiri" pitchFamily="2" charset="-78"/>
+                <a:ea typeface="Amiri" pitchFamily="2" charset="-78"/>
                 <a:cs typeface="Amiri" pitchFamily="2" charset="-78"/>
               </a:rPr>
               <a:t>لِمَاذَا؟</a:t>
@@ -41848,6 +42111,7 @@
                   <a:srgbClr val="D4AF37"/>
                 </a:solidFill>
                 <a:latin typeface="Amiri" pitchFamily="2" charset="-78"/>
+                <a:ea typeface="Amiri" pitchFamily="2" charset="-78"/>
                 <a:cs typeface="Amiri" pitchFamily="2" charset="-78"/>
               </a:rPr>
               <a:t>م</a:t>
@@ -42168,6 +42432,7 @@
                   <a:srgbClr val="8A6D1E"/>
                 </a:solidFill>
                 <a:latin typeface="Amiri" pitchFamily="2" charset="-78"/>
+                <a:ea typeface="Amiri" pitchFamily="2" charset="-78"/>
                 <a:cs typeface="Amiri" pitchFamily="2" charset="-78"/>
               </a:rPr>
               <a:t>فِي مَعْرِضِ المِهَنِ</a:t>
@@ -42448,6 +42713,7 @@
                   <a:srgbClr val="1B3B6F"/>
                 </a:solidFill>
                 <a:latin typeface="Amiri" pitchFamily="2" charset="-78"/>
+                <a:ea typeface="Amiri" pitchFamily="2" charset="-78"/>
                 <a:cs typeface="Amiri" pitchFamily="2" charset="-78"/>
               </a:rPr>
               <a:t>أَنَا فِي الصَّفِّ … فِي مَدْرَسَةِ …</a:t>
@@ -42524,6 +42790,7 @@
                   <a:srgbClr val="1B3B6F"/>
                 </a:solidFill>
                 <a:latin typeface="Amiri" pitchFamily="2" charset="-78"/>
+                <a:ea typeface="Amiri" pitchFamily="2" charset="-78"/>
                 <a:cs typeface="Amiri" pitchFamily="2" charset="-78"/>
               </a:rPr>
               <a:t>أَهْلًا! فِي أَيِّ صَفٍّ أَنْتَ؟</a:t>
@@ -42692,6 +42959,7 @@
                   <a:srgbClr val="1B3B6F"/>
                 </a:solidFill>
                 <a:latin typeface="Amiri" pitchFamily="2" charset="-78"/>
+                <a:ea typeface="Amiri" pitchFamily="2" charset="-78"/>
                 <a:cs typeface="Amiri" pitchFamily="2" charset="-78"/>
               </a:rPr>
               <a:t>مَادَّتِي المُفَضَّلَةُ … لِأَنَّ …</a:t>
@@ -42768,6 +43036,7 @@
                   <a:srgbClr val="1B3B6F"/>
                 </a:solidFill>
                 <a:latin typeface="Amiri" pitchFamily="2" charset="-78"/>
+                <a:ea typeface="Amiri" pitchFamily="2" charset="-78"/>
                 <a:cs typeface="Amiri" pitchFamily="2" charset="-78"/>
               </a:rPr>
               <a:t>مَا مَادَّتُكَ المُفَضَّلَةُ؟</a:t>
@@ -42936,6 +43205,7 @@
                   <a:srgbClr val="1B3B6F"/>
                 </a:solidFill>
                 <a:latin typeface="Amiri" pitchFamily="2" charset="-78"/>
+                <a:ea typeface="Amiri" pitchFamily="2" charset="-78"/>
                 <a:cs typeface="Amiri" pitchFamily="2" charset="-78"/>
               </a:rPr>
               <a:t>كَمْ أُسْبُوعًا …؟</a:t>
@@ -43012,6 +43282,7 @@
                   <a:srgbClr val="1B3B6F"/>
                 </a:solidFill>
                 <a:latin typeface="Amiri" pitchFamily="2" charset="-78"/>
+                <a:ea typeface="Amiri" pitchFamily="2" charset="-78"/>
                 <a:cs typeface="Amiri" pitchFamily="2" charset="-78"/>
               </a:rPr>
               <a:t>شَرِكَتُنَا تُقَدِّمُ تَدْرِيبًا صَيْفِيًّا.</a:t>
@@ -43180,6 +43451,7 @@
                   <a:srgbClr val="1B3B6F"/>
                 </a:solidFill>
                 <a:latin typeface="Amiri" pitchFamily="2" charset="-78"/>
+                <a:ea typeface="Amiri" pitchFamily="2" charset="-78"/>
                 <a:cs typeface="Amiri" pitchFamily="2" charset="-78"/>
               </a:rPr>
               <a:t>أُرِيدُ أَنْ أَكُونَ …</a:t>
@@ -43256,6 +43528,7 @@
                   <a:srgbClr val="1B3B6F"/>
                 </a:solidFill>
                 <a:latin typeface="Amiri" pitchFamily="2" charset="-78"/>
+                <a:ea typeface="Amiri" pitchFamily="2" charset="-78"/>
                 <a:cs typeface="Amiri" pitchFamily="2" charset="-78"/>
               </a:rPr>
               <a:t>أَرْبَعَةُ أَسَابِيعَ. مَاذَا تُرِيدُ أَنْ تَعْمَلَ فِي المُسْتَقْبَلِ؟</a:t>
@@ -43424,6 +43697,7 @@
                   <a:srgbClr val="1B3B6F"/>
                 </a:solidFill>
                 <a:latin typeface="Amiri" pitchFamily="2" charset="-78"/>
+                <a:ea typeface="Amiri" pitchFamily="2" charset="-78"/>
                 <a:cs typeface="Amiri" pitchFamily="2" charset="-78"/>
               </a:rPr>
               <a:t>نَعَمْ، عَمِلْتُ فِي …</a:t>
@@ -43500,6 +43774,7 @@
                   <a:srgbClr val="1B3B6F"/>
                 </a:solidFill>
                 <a:latin typeface="Amiri" pitchFamily="2" charset="-78"/>
+                <a:ea typeface="Amiri" pitchFamily="2" charset="-78"/>
                 <a:cs typeface="Amiri" pitchFamily="2" charset="-78"/>
               </a:rPr>
               <a:t>هَلْ عِنْدَكَ خِبْرَةُ عَمَلٍ؟</a:t>
@@ -43774,6 +44049,7 @@
                   <a:srgbClr val="D4AF37"/>
                 </a:solidFill>
                 <a:latin typeface="Amiri" pitchFamily="2" charset="-78"/>
+                <a:ea typeface="Amiri" pitchFamily="2" charset="-78"/>
                 <a:cs typeface="Amiri" pitchFamily="2" charset="-78"/>
               </a:rPr>
               <a:t>م</a:t>
@@ -44094,6 +44370,7 @@
                   <a:srgbClr val="8A6D1E"/>
                 </a:solidFill>
                 <a:latin typeface="Amiri" pitchFamily="2" charset="-78"/>
+                <a:ea typeface="Amiri" pitchFamily="2" charset="-78"/>
                 <a:cs typeface="Amiri" pitchFamily="2" charset="-78"/>
               </a:rPr>
               <a:t>مَعَ صَدِيقٍ ثُمَّ مَعَ المُدِيرِ</a:t>
@@ -44374,6 +44651,7 @@
                   <a:srgbClr val="1B3B6F"/>
                 </a:solidFill>
                 <a:latin typeface="Amiri" pitchFamily="2" charset="-78"/>
+                <a:ea typeface="Amiri" pitchFamily="2" charset="-78"/>
                 <a:cs typeface="Amiri" pitchFamily="2" charset="-78"/>
               </a:rPr>
               <a:t>نَعَمْ! أَعْمَلُ فِي … يَوْمَ …</a:t>
@@ -44450,6 +44728,7 @@
                   <a:srgbClr val="1B3B6F"/>
                 </a:solidFill>
                 <a:latin typeface="Amiri" pitchFamily="2" charset="-78"/>
+                <a:ea typeface="Amiri" pitchFamily="2" charset="-78"/>
                 <a:cs typeface="Amiri" pitchFamily="2" charset="-78"/>
               </a:rPr>
               <a:t>(صَدِيقٌ) أَهْلًا! سَمِعْتُ أَنَّكَ وَجَدْتَ عَمَلًا!</a:t>
@@ -44618,6 +44897,7 @@
                   <a:srgbClr val="1B3B6F"/>
                 </a:solidFill>
                 <a:latin typeface="Amiri" pitchFamily="2" charset="-78"/>
+                <a:ea typeface="Amiri" pitchFamily="2" charset="-78"/>
                 <a:cs typeface="Amiri" pitchFamily="2" charset="-78"/>
               </a:rPr>
               <a:t>العَمَلُ … لٰكِنَّ …</a:t>
@@ -44694,6 +44974,7 @@
                   <a:srgbClr val="1B3B6F"/>
                 </a:solidFill>
                 <a:latin typeface="Amiri" pitchFamily="2" charset="-78"/>
+                <a:ea typeface="Amiri" pitchFamily="2" charset="-78"/>
                 <a:cs typeface="Amiri" pitchFamily="2" charset="-78"/>
               </a:rPr>
               <a:t>وَكَيْفَ العَمَلُ؟</a:t>
@@ -44862,6 +45143,7 @@
                   <a:srgbClr val="1B3B6F"/>
                 </a:solidFill>
                 <a:latin typeface="Amiri" pitchFamily="2" charset="-78"/>
+                <a:ea typeface="Amiri" pitchFamily="2" charset="-78"/>
                 <a:cs typeface="Amiri" pitchFamily="2" charset="-78"/>
               </a:rPr>
               <a:t>صَبَاحَ النُّورِ يَا حَضْرَةَ المُدِيرِ … لٰكِنْ …</a:t>
@@ -44941,6 +45223,7 @@
                   <a:srgbClr val="1B3B6F"/>
                 </a:solidFill>
                 <a:latin typeface="Amiri" pitchFamily="2" charset="-78"/>
+                <a:ea typeface="Amiri" pitchFamily="2" charset="-78"/>
                 <a:cs typeface="Amiri" pitchFamily="2" charset="-78"/>
               </a:rPr>
               <a:t>(المُدِيرُ) صَبَاحَ الخَيْرِ. هَلْ يُمْكِنُكَ أَنْ تَعْمَلَ يَوْمَ الأَحَدِ أَيْضًا؟</a:t>
@@ -45044,6 +45327,7 @@
                   <a:srgbClr val="1B3B6F"/>
                 </a:solidFill>
                 <a:latin typeface="Amiri" pitchFamily="2" charset="-78"/>
+                <a:ea typeface="Amiri" pitchFamily="2" charset="-78"/>
                 <a:cs typeface="Amiri" pitchFamily="2" charset="-78"/>
               </a:rPr>
               <a:t>هَلْ يُمْكِنُنِي أَنْ …؟</a:t>
@@ -45120,6 +45404,7 @@
                   <a:srgbClr val="1B3B6F"/>
                 </a:solidFill>
                 <a:latin typeface="Amiri" pitchFamily="2" charset="-78"/>
+                <a:ea typeface="Amiri" pitchFamily="2" charset="-78"/>
                 <a:cs typeface="Amiri" pitchFamily="2" charset="-78"/>
               </a:rPr>
               <a:t>أَفْهَمُ. مَتَى تَنْتَهِي امْتِحَانَاتُكَ؟</a:t>
@@ -45223,6 +45508,7 @@
                   <a:srgbClr val="1B3B6F"/>
                 </a:solidFill>
                 <a:latin typeface="Amiri" pitchFamily="2" charset="-78"/>
+                <a:ea typeface="Amiri" pitchFamily="2" charset="-78"/>
                 <a:cs typeface="Amiri" pitchFamily="2" charset="-78"/>
               </a:rPr>
               <a:t>سَأَدْرُسُ … لِأَنِّي أَطْمَحُ إِلَى …</a:t>
@@ -45299,6 +45585,7 @@
                   <a:srgbClr val="1B3B6F"/>
                 </a:solidFill>
                 <a:latin typeface="Amiri" pitchFamily="2" charset="-78"/>
+                <a:ea typeface="Amiri" pitchFamily="2" charset="-78"/>
                 <a:cs typeface="Amiri" pitchFamily="2" charset="-78"/>
               </a:rPr>
               <a:t>طَبْعًا. وَمَاذَا سَتَدْرُسُ بَعْدَ المَدْرَسَةِ؟</a:t>
@@ -45473,13 +45760,9 @@
     <a:fontScheme name="Office">
       <a:majorFont>
         <a:latin typeface="Calibri Light" panose="020F0302020204030204"/>
-        <a:ea typeface=""/>
-        <a:cs typeface=""/>
-        <a:font script="Jpan" typeface="游ゴシック Light"/>
-        <a:font script="Hang" typeface="맑은 고딕"/>
-        <a:font script="Hans" typeface="等线 Light"/>
-        <a:font script="Hant" typeface="新細明體"/>
-        <a:font script="Arab" typeface="Times New Roman"/>
+        <a:ea typeface="Amiri" pitchFamily="2" charset="-78"/>
+        <a:cs typeface="Amiri" pitchFamily="2" charset="-78"/>
+        <a:font script="Arab" typeface="Amiri"/>
         <a:font script="Hebr" typeface="Times New Roman"/>
         <a:font script="Thai" typeface="Angsana New"/>
         <a:font script="Ethi" typeface="Nyala"/>
@@ -45525,13 +45808,9 @@
       </a:majorFont>
       <a:minorFont>
         <a:latin typeface="Calibri" panose="020F0502020204030204"/>
-        <a:ea typeface=""/>
-        <a:cs typeface=""/>
-        <a:font script="Jpan" typeface="游ゴシック"/>
-        <a:font script="Hang" typeface="맑은 고딕"/>
-        <a:font script="Hans" typeface="等线"/>
-        <a:font script="Hant" typeface="新細明體"/>
-        <a:font script="Arab" typeface="Arial"/>
+        <a:ea typeface="Amiri" pitchFamily="2" charset="-78"/>
+        <a:cs typeface="Amiri" pitchFamily="2" charset="-78"/>
+        <a:font script="Arab" typeface="Amiri"/>
         <a:font script="Hebr" typeface="Arial"/>
         <a:font script="Thai" typeface="Cordia New"/>
         <a:font script="Ethi" typeface="Nyala"/>
